--- a/snolab/collection_efficiency/presentation/SNOLAB_R4_collection_efficiency_20260910_zh.pptx
+++ b/snolab/collection_efficiency/presentation/SNOLAB_R4_collection_efficiency_20260910_zh.pptx
@@ -5130,7 +5130,7 @@
                 </a:solidFill>
                 <a:latin typeface="Droid Sans Fallback"/>
               </a:rPr>
-              <a:t>能量来自拟合脉冲：没有最大值的噪声偏差，没有漂移，不需要积分窗口。</a:t>
+              <a:t>能量来自拟合脉冲、从 −∞ 积到 +∞：没有最大值的噪声偏差，没有漂移。</a:t>
             </a:r>
           </a:p>
           <a:p>
@@ -6623,7 +6623,7 @@
                 </a:solidFill>
                 <a:latin typeface="Droid Sans Fallback"/>
               </a:rPr>
-              <a:t>如果脉冲是双指数形状，能量就是 A、τ_f、τ_r 的一个公式 —— 不需要积分窗口。</a:t>
+              <a:t>拟合出双指数，从 −∞ 积到 +∞：能量就是 A、τ_f、τ_r 的一个公式。</a:t>
             </a:r>
           </a:p>
         </p:txBody>

--- a/snolab/collection_efficiency/presentation/SNOLAB_R4_collection_efficiency_20260910_zh.pptx
+++ b/snolab/collection_efficiency/presentation/SNOLAB_R4_collection_efficiency_20260910_zh.pptx
@@ -7366,7 +7366,7 @@
       </p:sp>
       <p:pic>
         <p:nvPicPr>
-          <p:cNvPr id="5" name="Picture 4" descr="cum_ev30646.png"/>
+          <p:cNvPr id="5" name="Picture 4" descr="cum_slide.png"/>
           <p:cNvPicPr>
             <a:picLocks noChangeAspect="1"/>
           </p:cNvPicPr>
@@ -7380,72 +7380,24 @@
         </p:blipFill>
         <p:spPr>
           <a:xfrm>
-            <a:off x="502920" y="1304367"/>
-            <a:ext cx="5532120" cy="1871826"/>
+            <a:off x="502920" y="1413509"/>
+            <a:ext cx="11247120" cy="3436620"/>
           </a:xfrm>
           <a:prstGeom prst="rect">
             <a:avLst/>
           </a:prstGeom>
         </p:spPr>
       </p:pic>
-      <p:pic>
-        <p:nvPicPr>
-          <p:cNvPr id="6" name="Picture 5" descr="cum_ev210571.png"/>
-          <p:cNvPicPr>
-            <a:picLocks noChangeAspect="1"/>
-          </p:cNvPicPr>
-          <p:nvPr/>
-        </p:nvPicPr>
-        <p:blipFill>
-          <a:blip r:embed="rId4"/>
-          <a:stretch>
-            <a:fillRect/>
-          </a:stretch>
-        </p:blipFill>
-        <p:spPr>
-          <a:xfrm>
-            <a:off x="6217920" y="1185226"/>
-            <a:ext cx="5532120" cy="2110108"/>
-          </a:xfrm>
-          <a:prstGeom prst="rect">
-            <a:avLst/>
-          </a:prstGeom>
-        </p:spPr>
-      </p:pic>
-      <p:pic>
-        <p:nvPicPr>
-          <p:cNvPr id="7" name="Picture 6" descr="cum_legend.png"/>
-          <p:cNvPicPr>
-            <a:picLocks noChangeAspect="1"/>
-          </p:cNvPicPr>
-          <p:nvPr/>
-        </p:nvPicPr>
-        <p:blipFill>
-          <a:blip r:embed="rId5"/>
-          <a:stretch>
-            <a:fillRect/>
-          </a:stretch>
-        </p:blipFill>
-        <p:spPr>
-          <a:xfrm>
-            <a:off x="3017520" y="3406616"/>
-            <a:ext cx="6126480" cy="319087"/>
-          </a:xfrm>
-          <a:prstGeom prst="rect">
-            <a:avLst/>
-          </a:prstGeom>
-        </p:spPr>
-      </p:pic>
-      <p:sp>
-        <p:nvSpPr>
-          <p:cNvPr id="8" name="TextBox 7"/>
+      <p:sp>
+        <p:nvSpPr>
+          <p:cNvPr id="6" name="TextBox 5"/>
           <p:cNvSpPr txBox="1"/>
           <p:nvPr/>
         </p:nvSpPr>
         <p:spPr>
           <a:xfrm>
-            <a:off x="502920" y="4023360"/>
-            <a:ext cx="11247120" cy="2194560"/>
+            <a:off x="502920" y="5257800"/>
+            <a:ext cx="11247120" cy="1234440"/>
           </a:xfrm>
           <a:prstGeom prst="rect">
             <a:avLst/>
@@ -7464,7 +7416,7 @@
               </a:spcAft>
             </a:pPr>
             <a:r>
-              <a:rPr sz="1600" b="0" i="0">
+              <a:rPr sz="1500" b="0" i="0">
                 <a:solidFill>
                   <a:srgbClr val="333333"/>
                 </a:solidFill>
@@ -7480,7 +7432,7 @@
               </a:spcAft>
             </a:pPr>
             <a:r>
-              <a:rPr sz="1600" b="1" i="0">
+              <a:rPr sz="1500" b="1" i="0">
                 <a:solidFill>
                   <a:srgbClr val="C0392B"/>
                 </a:solidFill>
@@ -7633,7 +7585,7 @@
       </p:sp>
       <p:pic>
         <p:nvPicPr>
-          <p:cNvPr id="5" name="Picture 4" descr="allchan_PBS1.png"/>
+          <p:cNvPr id="5" name="Picture 4" descr="allchan_slide.png"/>
           <p:cNvPicPr>
             <a:picLocks noChangeAspect="1"/>
           </p:cNvPicPr>
@@ -7647,89 +7599,17 @@
         </p:blipFill>
         <p:spPr>
           <a:xfrm>
-            <a:off x="502920" y="1154757"/>
-            <a:ext cx="5532120" cy="1896726"/>
+            <a:off x="1941141" y="1143000"/>
+            <a:ext cx="8370678" cy="4069080"/>
           </a:xfrm>
           <a:prstGeom prst="rect">
             <a:avLst/>
           </a:prstGeom>
         </p:spPr>
       </p:pic>
-      <p:pic>
-        <p:nvPicPr>
-          <p:cNvPr id="6" name="Picture 5" descr="allchan_PES1.png"/>
-          <p:cNvPicPr>
-            <a:picLocks noChangeAspect="1"/>
-          </p:cNvPicPr>
-          <p:nvPr/>
-        </p:nvPicPr>
-        <p:blipFill>
-          <a:blip r:embed="rId4"/>
-          <a:stretch>
-            <a:fillRect/>
-          </a:stretch>
-        </p:blipFill>
-        <p:spPr>
-          <a:xfrm>
-            <a:off x="6217920" y="1154757"/>
-            <a:ext cx="5532120" cy="1896726"/>
-          </a:xfrm>
-          <a:prstGeom prst="rect">
-            <a:avLst/>
-          </a:prstGeom>
-        </p:spPr>
-      </p:pic>
-      <p:pic>
-        <p:nvPicPr>
-          <p:cNvPr id="7" name="Picture 6" descr="allchan_PES2.png"/>
-          <p:cNvPicPr>
-            <a:picLocks noChangeAspect="1"/>
-          </p:cNvPicPr>
-          <p:nvPr/>
-        </p:nvPicPr>
-        <p:blipFill>
-          <a:blip r:embed="rId5"/>
-          <a:stretch>
-            <a:fillRect/>
-          </a:stretch>
-        </p:blipFill>
-        <p:spPr>
-          <a:xfrm>
-            <a:off x="502920" y="3166437"/>
-            <a:ext cx="5532120" cy="1896726"/>
-          </a:xfrm>
-          <a:prstGeom prst="rect">
-            <a:avLst/>
-          </a:prstGeom>
-        </p:spPr>
-      </p:pic>
-      <p:pic>
-        <p:nvPicPr>
-          <p:cNvPr id="8" name="Picture 7" descr="allchan_PDS2.png"/>
-          <p:cNvPicPr>
-            <a:picLocks noChangeAspect="1"/>
-          </p:cNvPicPr>
-          <p:nvPr/>
-        </p:nvPicPr>
-        <p:blipFill>
-          <a:blip r:embed="rId6"/>
-          <a:stretch>
-            <a:fillRect/>
-          </a:stretch>
-        </p:blipFill>
-        <p:spPr>
-          <a:xfrm>
-            <a:off x="6217920" y="3166437"/>
-            <a:ext cx="5532120" cy="1896726"/>
-          </a:xfrm>
-          <a:prstGeom prst="rect">
-            <a:avLst/>
-          </a:prstGeom>
-        </p:spPr>
-      </p:pic>
-      <p:sp>
-        <p:nvSpPr>
-          <p:cNvPr id="9" name="TextBox 8"/>
+      <p:sp>
+        <p:nvSpPr>
+          <p:cNvPr id="6" name="TextBox 5"/>
           <p:cNvSpPr txBox="1"/>
           <p:nvPr/>
         </p:nvSpPr>

--- a/snolab/collection_efficiency/presentation/SNOLAB_R4_collection_efficiency_20260910_zh.pptx
+++ b/snolab/collection_efficiency/presentation/SNOLAB_R4_collection_efficiency_20260910_zh.pptx
@@ -4642,17 +4642,6 @@
               <a:t>Z7 的声子收集效率</a:t>
             </a:r>
           </a:p>
-          <a:p>
-            <a:r>
-              <a:rPr sz="1800" b="0" i="0">
-                <a:solidFill>
-                  <a:srgbClr val="666666"/>
-                </a:solidFill>
-                <a:latin typeface="Droid Sans Fallback"/>
-              </a:rPr>
-              <a:t>一个 10.37 keV 的 K 线事件，有多少能量最后到了 TES 里 —— 先从一个脉冲读出来，再推到整个探测器</a:t>
-            </a:r>
-          </a:p>
         </p:txBody>
       </p:sp>
       <p:sp>
@@ -6383,7 +6372,7 @@
                 </a:solidFill>
                 <a:latin typeface="Droid Sans Fallback"/>
               </a:rPr>
-              <a:t>电流曲线下面的面积是电荷，不是能量 —— 所以必须先把脉冲换成功率。</a:t>
+              <a:t>电流曲线下面的面积不是能量 —— 所以必须先把脉冲换成功率。</a:t>
             </a:r>
           </a:p>
           <a:p>

--- a/snolab/collection_efficiency/presentation/SNOLAB_R4_collection_efficiency_20260910_zh.pptx
+++ b/snolab/collection_efficiency/presentation/SNOLAB_R4_collection_efficiency_20260910_zh.pptx
@@ -6581,22 +6581,6 @@
                 <a:latin typeface="Droid Sans Fallback"/>
               </a:rPr>
               <a:t>功率 = 电流变化 δI 之后焦耳热的变化量：一个线性项，加一个很小的二次项。</a:t>
-            </a:r>
-          </a:p>
-          <a:p>
-            <a:pPr>
-              <a:spcAft>
-                <a:spcPts val="800"/>
-              </a:spcAft>
-            </a:pPr>
-            <a:r>
-              <a:rPr sz="1600" b="0" i="0">
-                <a:solidFill>
-                  <a:srgbClr val="333333"/>
-                </a:solidFill>
-                <a:latin typeface="Droid Sans Fallback"/>
-              </a:rPr>
-              <a:t>两个系数都是这个通道实测的偏置点 —— 没有任何拟合和调参。</a:t>
             </a:r>
           </a:p>
           <a:p>

--- a/snolab/collection_efficiency/presentation/SNOLAB_R4_collection_efficiency_20260910_zh.pptx
+++ b/snolab/collection_efficiency/presentation/SNOLAB_R4_collection_efficiency_20260910_zh.pptx
@@ -22,6 +22,7 @@
     <p:sldId id="270" r:id="rId22"/>
     <p:sldId id="271" r:id="rId23"/>
     <p:sldId id="272" r:id="rId24"/>
+    <p:sldId id="273" r:id="rId25"/>
   </p:sldIdLst>
   <p:sldSz cx="12191695" cy="6858000" type="screen4x3"/>
   <p:notesSz cx="6858000" cy="9144000"/>
@@ -1002,6 +1003,72 @@
 </file>
 
 <file path=ppt/notesSlides/notesSlide17.xml><?xml version="1.0" encoding="utf-8"?>
+<p:notes xmlns:a="http://schemas.openxmlformats.org/drawingml/2006/main" xmlns:p="http://schemas.openxmlformats.org/presentationml/2006/main" xmlns:r="http://schemas.openxmlformats.org/officeDocument/2006/relationships">
+  <p:cSld>
+    <p:spTree>
+      <p:nvGrpSpPr>
+        <p:cNvPr id="1" name=""/>
+        <p:cNvGrpSpPr/>
+        <p:nvPr/>
+      </p:nvGrpSpPr>
+      <p:grpSpPr>
+        <a:xfrm>
+          <a:off x="0" y="0"/>
+          <a:ext cx="0" cy="0"/>
+          <a:chOff x="0" y="0"/>
+          <a:chExt cx="0" cy="0"/>
+        </a:xfrm>
+      </p:grpSpPr>
+      <p:sp>
+        <p:nvSpPr>
+          <p:cNvPr id="2" name="Slide Image Placeholder 1"/>
+          <p:cNvSpPr>
+            <a:spLocks noGrp="1"/>
+          </p:cNvSpPr>
+          <p:nvPr>
+            <p:ph type="sldImg" idx="2"/>
+          </p:nvPr>
+        </p:nvSpPr>
+        <p:spPr/>
+      </p:sp>
+      <p:sp>
+        <p:nvSpPr>
+          <p:cNvPr id="3" name="Notes Placeholder 2"/>
+          <p:cNvSpPr>
+            <a:spLocks noGrp="1"/>
+          </p:cNvSpPr>
+          <p:nvPr>
+            <p:ph type="body" idx="3" sz="quarter"/>
+          </p:nvPr>
+        </p:nvSpPr>
+        <p:spPr/>
+        <p:txBody>
+          <a:bodyPr/>
+          <a:lstStyle/>
+          <a:p/>
+        </p:txBody>
+      </p:sp>
+      <p:sp>
+        <p:nvSpPr>
+          <p:cNvPr id="4" name="Slide Number Placeholder 3"/>
+          <p:cNvSpPr>
+            <a:spLocks noGrp="1"/>
+          </p:cNvSpPr>
+          <p:nvPr>
+            <p:ph type="sldNum" idx="5" sz="quarter"/>
+          </p:nvPr>
+        </p:nvSpPr>
+        <p:spPr/>
+      </p:sp>
+    </p:spTree>
+  </p:cSld>
+  <p:clrMapOvr>
+    <a:masterClrMapping/>
+  </p:clrMapOvr>
+</p:notes>
+</file>
+
+<file path=ppt/notesSlides/notesSlide18.xml><?xml version="1.0" encoding="utf-8"?>
 <p:notes xmlns:a="http://schemas.openxmlformats.org/drawingml/2006/main" xmlns:p="http://schemas.openxmlformats.org/presentationml/2006/main" xmlns:r="http://schemas.openxmlformats.org/officeDocument/2006/relationships">
   <p:cSld>
     <p:spTree>
@@ -4736,7 +4803,7 @@
                 </a:solidFill>
                 <a:latin typeface="Droid Sans Fallback"/>
               </a:rPr>
-              <a:t>各通道求和：32 ± 1%</a:t>
+              <a:t>现在看所有事件：一个通道给出又宽又歪的分布</a:t>
             </a:r>
           </a:p>
           <a:p>
@@ -4747,7 +4814,7 @@
                 </a:solidFill>
                 <a:latin typeface="Droid Sans Fallback"/>
               </a:rPr>
-              <a:t>每个 K 线事件被 TES 吸收的总能量</a:t>
+              <a:t>PBS1，1917 个 K 线事件，每个事件一次拟合、一次积分</a:t>
             </a:r>
           </a:p>
         </p:txBody>
@@ -4831,7 +4898,7 @@
       </p:sp>
       <p:pic>
         <p:nvPicPr>
-          <p:cNvPr id="5" name="Picture 4" descr="hist_sum.png"/>
+          <p:cNvPr id="5" name="Picture 4" descr="hist_PBS1.png"/>
           <p:cNvPicPr>
             <a:picLocks noChangeAspect="1"/>
           </p:cNvPicPr>
@@ -4881,13 +4948,13 @@
               </a:spcAft>
             </a:pPr>
             <a:r>
-              <a:rPr sz="1500" b="1" i="0">
-                <a:solidFill>
-                  <a:srgbClr val="C0392B"/>
+              <a:rPr sz="1500" b="0" i="0">
+                <a:solidFill>
+                  <a:srgbClr val="333333"/>
                 </a:solidFill>
                 <a:latin typeface="Droid Sans Fallback"/>
               </a:rPr>
-              <a:t>10 个通道求和，1827 个事件：3162 eV = 30.5%，宽度降到 7.5% —— 位置效应抵消了。</a:t>
+              <a:t>红色：来自拟合。灰色：官方窗口在原始波形上算的。峰位只差 0.2%。</a:t>
             </a:r>
           </a:p>
           <a:p>
@@ -4897,13 +4964,13 @@
               </a:spcAft>
             </a:pPr>
             <a:r>
-              <a:rPr sz="1500" b="0" i="0">
-                <a:solidFill>
-                  <a:srgbClr val="333333"/>
+              <a:rPr sz="1500" b="1" i="0">
+                <a:solidFill>
+                  <a:srgbClr val="C0392B"/>
                 </a:solidFill>
                 <a:latin typeface="Droid Sans Fallback"/>
               </a:rPr>
-              <a:t>PDS2 只有 42% 的事件能拟合上（那个缓慢起伏），而且这些事件不典型；它的份额只能给一个范围。</a:t>
+              <a:t>峰 285 eV，宽度 15% —— 这可是一条能量固定的谱线。</a:t>
             </a:r>
           </a:p>
           <a:p>
@@ -4913,13 +4980,13 @@
               </a:spcAft>
             </a:pPr>
             <a:r>
-              <a:rPr sz="1500" b="1" i="0">
-                <a:solidFill>
-                  <a:srgbClr val="C0392B"/>
+              <a:rPr sz="1500" b="0" i="0">
+                <a:solidFill>
+                  <a:srgbClr val="333333"/>
                 </a:solidFill>
                 <a:latin typeface="Droid Sans Fallback"/>
               </a:rPr>
-              <a:t>完整效率 31.5–32.9%：  32 ± 1%。</a:t>
+              <a:t>往右拖的尾巴，是发生在这个通道附近的事件。</a:t>
             </a:r>
           </a:p>
           <a:p>
@@ -4929,13 +4996,13 @@
               </a:spcAft>
             </a:pPr>
             <a:r>
-              <a:rPr sz="1500" b="0" i="0">
-                <a:solidFill>
-                  <a:srgbClr val="333333"/>
+              <a:rPr sz="1500" b="1" i="0">
+                <a:solidFill>
+                  <a:srgbClr val="C0392B"/>
                 </a:solidFill>
                 <a:latin typeface="Droid Sans Fallback"/>
               </a:rPr>
-              <a:t>红线：10.37 keV —— 三分之二的能量根本没到 TES。</a:t>
+              <a:t>单通道的宽度是事件位置，不是噪声。</a:t>
             </a:r>
           </a:p>
         </p:txBody>
@@ -4987,7 +5054,18 @@
                 </a:solidFill>
                 <a:latin typeface="Droid Sans Fallback"/>
               </a:rPr>
-              <a:t>总结，以及还没落实的</a:t>
+              <a:t>各通道求和：32 ± 1%</a:t>
+            </a:r>
+          </a:p>
+          <a:p>
+            <a:r>
+              <a:rPr sz="1400" b="0" i="0">
+                <a:solidFill>
+                  <a:srgbClr val="666666"/>
+                </a:solidFill>
+                <a:latin typeface="Droid Sans Fallback"/>
+              </a:rPr>
+              <a:t>每个 K 线事件被 TES 吸收的总能量</a:t>
             </a:r>
           </a:p>
         </p:txBody>
@@ -5069,16 +5147,40 @@
           </a:p>
         </p:txBody>
       </p:sp>
-      <p:sp>
-        <p:nvSpPr>
-          <p:cNvPr id="5" name="TextBox 4"/>
+      <p:pic>
+        <p:nvPicPr>
+          <p:cNvPr id="5" name="Picture 4" descr="hist_sum.png"/>
+          <p:cNvPicPr>
+            <a:picLocks noChangeAspect="1"/>
+          </p:cNvPicPr>
+          <p:nvPr/>
+        </p:nvPicPr>
+        <p:blipFill>
+          <a:blip r:embed="rId3"/>
+          <a:stretch>
+            <a:fillRect/>
+          </a:stretch>
+        </p:blipFill>
+        <p:spPr>
+          <a:xfrm>
+            <a:off x="502920" y="1412748"/>
+            <a:ext cx="7863840" cy="4718304"/>
+          </a:xfrm>
+          <a:prstGeom prst="rect">
+            <a:avLst/>
+          </a:prstGeom>
+        </p:spPr>
+      </p:pic>
+      <p:sp>
+        <p:nvSpPr>
+          <p:cNvPr id="6" name="TextBox 5"/>
           <p:cNvSpPr txBox="1"/>
           <p:nvPr/>
         </p:nvSpPr>
         <p:spPr>
           <a:xfrm>
-            <a:off x="502920" y="1325880"/>
-            <a:ext cx="11247120" cy="5029200"/>
+            <a:off x="8549640" y="1463040"/>
+            <a:ext cx="3291840" cy="4572000"/>
           </a:xfrm>
           <a:prstGeom prst="rect">
             <a:avLst/>
@@ -5097,13 +5199,13 @@
               </a:spcAft>
             </a:pPr>
             <a:r>
-              <a:rPr sz="1700" b="0" i="0">
-                <a:solidFill>
-                  <a:srgbClr val="333333"/>
+              <a:rPr sz="1500" b="1" i="0">
+                <a:solidFill>
+                  <a:srgbClr val="C0392B"/>
                 </a:solidFill>
                 <a:latin typeface="Droid Sans Fallback"/>
               </a:rPr>
-              <a:t>电流脉冲通过 TES 方程变成功率脉冲；功率下面的面积就是能量。二次项只有 2%。</a:t>
+              <a:t>10 个通道求和，1827 个事件：3162 eV = 30.5%，宽度降到 7.5% —— 位置效应抵消了。</a:t>
             </a:r>
           </a:p>
           <a:p>
@@ -5113,13 +5215,13 @@
               </a:spcAft>
             </a:pPr>
             <a:r>
-              <a:rPr sz="1700" b="0" i="0">
+              <a:rPr sz="1500" b="0" i="0">
                 <a:solidFill>
                   <a:srgbClr val="333333"/>
                 </a:solidFill>
                 <a:latin typeface="Droid Sans Fallback"/>
               </a:rPr>
-              <a:t>能量来自拟合脉冲、从 −∞ 积到 +∞：没有最大值的噪声偏差，没有漂移。</a:t>
+              <a:t>PDS2 只有 42% 的事件能拟合上（那个缓慢起伏），而且这些事件不典型；它的份额只能给一个范围。</a:t>
             </a:r>
           </a:p>
           <a:p>
@@ -5129,13 +5231,13 @@
               </a:spcAft>
             </a:pPr>
             <a:r>
-              <a:rPr sz="1700" b="0" i="0">
-                <a:solidFill>
-                  <a:srgbClr val="333333"/>
+              <a:rPr sz="1500" b="1" i="0">
+                <a:solidFill>
+                  <a:srgbClr val="C0392B"/>
                 </a:solidFill>
                 <a:latin typeface="Droid Sans Fallback"/>
               </a:rPr>
-              <a:t>单通道：15% 宽、歪的（位置效应）。10 个通道求和：7.5%、对称。</a:t>
+              <a:t>完整效率 31.5–32.9%：  32 ± 1%。</a:t>
             </a:r>
           </a:p>
           <a:p>
@@ -5145,29 +5247,13 @@
               </a:spcAft>
             </a:pPr>
             <a:r>
-              <a:rPr sz="1700" b="1" i="0">
-                <a:solidFill>
-                  <a:srgbClr val="C0392B"/>
+              <a:rPr sz="1500" b="0" i="0">
+                <a:solidFill>
+                  <a:srgbClr val="333333"/>
                 </a:solidFill>
                 <a:latin typeface="Droid Sans Fallback"/>
               </a:rPr>
-              <a:t>Z7 把一个 10.37 keV 事件的 32 ± 1% 吸收进 TES。CDMS 文档在 R37 CUTE tower 上报的是 26–41%。</a:t>
-            </a:r>
-          </a:p>
-          <a:p>
-            <a:pPr>
-              <a:spcAft>
-                <a:spcPts val="800"/>
-              </a:spcAft>
-            </a:pPr>
-            <a:r>
-              <a:rPr sz="1700" b="0" i="0">
-                <a:solidFill>
-                  <a:srgbClr val="333333"/>
-                </a:solidFill>
-                <a:latin typeface="Droid Sans Fallback"/>
-              </a:rPr>
-              <a:t>还没落实：只做了 Z7 · Z7 的 HV 偏压没有确认（按 0 V 算） · 没有 dI/dV，电感项被丢掉 · PDS2 就是那 ±1% · 12.5% 的事件在任何通道都拟合不上，没进直方图。</a:t>
+              <a:t>红线：10.37 keV —— 三分之二的能量根本没到 TES。</a:t>
             </a:r>
           </a:p>
         </p:txBody>
@@ -5219,7 +5305,7 @@
                 </a:solidFill>
                 <a:latin typeface="Droid Sans Fallback"/>
               </a:rPr>
-              <a:t>Backup — 事件谱</a:t>
+              <a:t>总结，以及还没落实的</a:t>
             </a:r>
           </a:p>
         </p:txBody>
@@ -5301,30 +5387,109 @@
           </a:p>
         </p:txBody>
       </p:sp>
-      <p:pic>
-        <p:nvPicPr>
-          <p:cNvPr id="5" name="Picture 4" descr="spectrum_zip7.png"/>
-          <p:cNvPicPr>
-            <a:picLocks noChangeAspect="1"/>
-          </p:cNvPicPr>
+      <p:sp>
+        <p:nvSpPr>
+          <p:cNvPr id="5" name="TextBox 4"/>
+          <p:cNvSpPr txBox="1"/>
           <p:nvPr/>
-        </p:nvPicPr>
-        <p:blipFill>
-          <a:blip r:embed="rId3"/>
-          <a:stretch>
-            <a:fillRect/>
-          </a:stretch>
-        </p:blipFill>
-        <p:spPr>
-          <a:xfrm>
-            <a:off x="991910" y="1143000"/>
-            <a:ext cx="10269140" cy="5257800"/>
-          </a:xfrm>
-          <a:prstGeom prst="rect">
-            <a:avLst/>
-          </a:prstGeom>
-        </p:spPr>
-      </p:pic>
+        </p:nvSpPr>
+        <p:spPr>
+          <a:xfrm>
+            <a:off x="502920" y="1325880"/>
+            <a:ext cx="11247120" cy="5029200"/>
+          </a:xfrm>
+          <a:prstGeom prst="rect">
+            <a:avLst/>
+          </a:prstGeom>
+          <a:noFill/>
+        </p:spPr>
+        <p:txBody>
+          <a:bodyPr wrap="square">
+            <a:spAutoFit/>
+          </a:bodyPr>
+          <a:lstStyle/>
+          <a:p>
+            <a:pPr>
+              <a:spcAft>
+                <a:spcPts val="800"/>
+              </a:spcAft>
+            </a:pPr>
+            <a:r>
+              <a:rPr sz="1700" b="0" i="0">
+                <a:solidFill>
+                  <a:srgbClr val="333333"/>
+                </a:solidFill>
+                <a:latin typeface="Droid Sans Fallback"/>
+              </a:rPr>
+              <a:t>电流脉冲通过 TES 方程变成功率脉冲；功率下面的面积就是能量。二次项只有 2%。</a:t>
+            </a:r>
+          </a:p>
+          <a:p>
+            <a:pPr>
+              <a:spcAft>
+                <a:spcPts val="800"/>
+              </a:spcAft>
+            </a:pPr>
+            <a:r>
+              <a:rPr sz="1700" b="0" i="0">
+                <a:solidFill>
+                  <a:srgbClr val="333333"/>
+                </a:solidFill>
+                <a:latin typeface="Droid Sans Fallback"/>
+              </a:rPr>
+              <a:t>能量来自拟合脉冲、从 −∞ 积到 +∞：没有最大值的噪声偏差，没有漂移。</a:t>
+            </a:r>
+          </a:p>
+          <a:p>
+            <a:pPr>
+              <a:spcAft>
+                <a:spcPts val="800"/>
+              </a:spcAft>
+            </a:pPr>
+            <a:r>
+              <a:rPr sz="1700" b="0" i="0">
+                <a:solidFill>
+                  <a:srgbClr val="333333"/>
+                </a:solidFill>
+                <a:latin typeface="Droid Sans Fallback"/>
+              </a:rPr>
+              <a:t>单通道：15% 宽、歪的（位置效应）。10 个通道求和：7.5%、对称。</a:t>
+            </a:r>
+          </a:p>
+          <a:p>
+            <a:pPr>
+              <a:spcAft>
+                <a:spcPts val="800"/>
+              </a:spcAft>
+            </a:pPr>
+            <a:r>
+              <a:rPr sz="1700" b="1" i="0">
+                <a:solidFill>
+                  <a:srgbClr val="C0392B"/>
+                </a:solidFill>
+                <a:latin typeface="Droid Sans Fallback"/>
+              </a:rPr>
+              <a:t>Z7 把一个 10.37 keV 事件的 32 ± 1% 吸收进 TES。CDMS 文档在 R37 CUTE tower 上报的是 26–41%。</a:t>
+            </a:r>
+          </a:p>
+          <a:p>
+            <a:pPr>
+              <a:spcAft>
+                <a:spcPts val="800"/>
+              </a:spcAft>
+            </a:pPr>
+            <a:r>
+              <a:rPr sz="1700" b="0" i="0">
+                <a:solidFill>
+                  <a:srgbClr val="333333"/>
+                </a:solidFill>
+                <a:latin typeface="Droid Sans Fallback"/>
+              </a:rPr>
+              <a:t>还没落实：只做了 Z7 · Z7 的 HV 偏压没有确认（按 0 V 算） · 没有 dI/dV，电感项被丢掉 · PDS2 就是那 ±1% · 12.5% 的事件在任何通道都拟合不上，没进直方图。</a:t>
+            </a:r>
+          </a:p>
+        </p:txBody>
+      </p:sp>
     </p:spTree>
   </p:cSld>
   <p:clrMapOvr>
@@ -5372,7 +5537,7 @@
                 </a:solidFill>
                 <a:latin typeface="Droid Sans Fallback"/>
               </a:rPr>
-              <a:t>Backup — 功率公式的三个版本</a:t>
+              <a:t>Backup — 事件谱</a:t>
             </a:r>
           </a:p>
         </p:txBody>
@@ -5454,93 +5619,30 @@
           </a:p>
         </p:txBody>
       </p:sp>
-      <p:sp>
-        <p:nvSpPr>
-          <p:cNvPr id="5" name="TextBox 4"/>
-          <p:cNvSpPr txBox="1"/>
+      <p:pic>
+        <p:nvPicPr>
+          <p:cNvPr id="5" name="Picture 4" descr="spectrum_zip7.png"/>
+          <p:cNvPicPr>
+            <a:picLocks noChangeAspect="1"/>
+          </p:cNvPicPr>
           <p:nvPr/>
-        </p:nvSpPr>
-        <p:spPr>
-          <a:xfrm>
-            <a:off x="502920" y="1325880"/>
-            <a:ext cx="11247120" cy="5029200"/>
-          </a:xfrm>
-          <a:prstGeom prst="rect">
-            <a:avLst/>
-          </a:prstGeom>
-          <a:noFill/>
-        </p:spPr>
-        <p:txBody>
-          <a:bodyPr wrap="square">
-            <a:spAutoFit/>
-          </a:bodyPr>
-          <a:lstStyle/>
-          <a:p>
-            <a:pPr>
-              <a:spcAft>
-                <a:spcPts val="800"/>
-              </a:spcAft>
-            </a:pPr>
-            <a:r>
-              <a:rPr sz="1700" b="0" i="0">
-                <a:solidFill>
-                  <a:srgbClr val="333333"/>
-                </a:solidFill>
-                <a:latin typeface="Droid Sans Fallback"/>
-              </a:rPr>
-              <a:t>P = I₀(R_L − R₀)·δI + c₂·R_L·(δI)²     c₂ = 2（method 1，本报告用的）、1（精确的小信号解）、−1（method 2）</a:t>
-            </a:r>
-          </a:p>
-          <a:p>
-            <a:pPr>
-              <a:spcAft>
-                <a:spcPts val="800"/>
-              </a:spcAft>
-            </a:pPr>
-            <a:r>
-              <a:rPr sz="1700" b="0" i="0">
-                <a:solidFill>
-                  <a:srgbClr val="333333"/>
-                </a:solidFill>
-                <a:latin typeface="Droid Sans Fallback"/>
-              </a:rPr>
-              <a:t>相对精确解：method 1 高 0.58%，method 2 低 1.15% —— 远小于单通道 15% 的宽度和 PDS2 的范围。</a:t>
-            </a:r>
-          </a:p>
-          <a:p>
-            <a:pPr>
-              <a:spcAft>
-                <a:spcPts val="800"/>
-              </a:spcAft>
-            </a:pPr>
-            <a:r>
-              <a:rPr sz="1700" b="0" i="0">
-                <a:solidFill>
-                  <a:srgbClr val="333333"/>
-                </a:solidFill>
-                <a:latin typeface="Droid Sans Fallback"/>
-              </a:rPr>
-              <a:t>完整方程里的电感项需要 L 和 loop gain，要从 dI/dV 来，MSI 上这些 series 没有这个数据；这一项被忽略。</a:t>
-            </a:r>
-          </a:p>
-          <a:p>
-            <a:pPr>
-              <a:spcAft>
-                <a:spcPts val="800"/>
-              </a:spcAft>
-            </a:pPr>
-            <a:r>
-              <a:rPr sz="1700" b="0" i="0">
-                <a:solidFill>
-                  <a:srgbClr val="333333"/>
-                </a:solidFill>
-                <a:latin typeface="Droid Sans Fallback"/>
-              </a:rPr>
-              <a:t>官方 Eabs（触发在第 16383 点，基线是 93..15758 点的平均，5 阶 20 kHz 预滤波，窗口 −0.5/+1 ms，同一个公式）复现到 0.2%；直方图页上的灰色轮廓就是它。</a:t>
-            </a:r>
-          </a:p>
-        </p:txBody>
-      </p:sp>
+        </p:nvPicPr>
+        <p:blipFill>
+          <a:blip r:embed="rId3"/>
+          <a:stretch>
+            <a:fillRect/>
+          </a:stretch>
+        </p:blipFill>
+        <p:spPr>
+          <a:xfrm>
+            <a:off x="991910" y="1143000"/>
+            <a:ext cx="10269140" cy="5257800"/>
+          </a:xfrm>
+          <a:prstGeom prst="rect">
+            <a:avLst/>
+          </a:prstGeom>
+        </p:spPr>
+      </p:pic>
     </p:spTree>
   </p:cSld>
   <p:clrMapOvr>
@@ -5588,7 +5690,7 @@
                 </a:solidFill>
                 <a:latin typeface="Droid Sans Fallback"/>
               </a:rPr>
-              <a:t>Backup — 15 个事件，拟合电流和功率（PBS1）</a:t>
+              <a:t>Backup — 功率公式的三个版本</a:t>
             </a:r>
           </a:p>
         </p:txBody>
@@ -5670,30 +5772,93 @@
           </a:p>
         </p:txBody>
       </p:sp>
-      <p:pic>
-        <p:nvPicPr>
-          <p:cNvPr id="5" name="Picture 4" descr="pulse_15events.png"/>
-          <p:cNvPicPr>
-            <a:picLocks noChangeAspect="1"/>
-          </p:cNvPicPr>
+      <p:sp>
+        <p:nvSpPr>
+          <p:cNvPr id="5" name="TextBox 4"/>
+          <p:cNvSpPr txBox="1"/>
           <p:nvPr/>
-        </p:nvPicPr>
-        <p:blipFill>
-          <a:blip r:embed="rId3"/>
-          <a:stretch>
-            <a:fillRect/>
-          </a:stretch>
-        </p:blipFill>
-        <p:spPr>
-          <a:xfrm>
-            <a:off x="2671354" y="1143000"/>
-            <a:ext cx="6910251" cy="5257800"/>
-          </a:xfrm>
-          <a:prstGeom prst="rect">
-            <a:avLst/>
-          </a:prstGeom>
-        </p:spPr>
-      </p:pic>
+        </p:nvSpPr>
+        <p:spPr>
+          <a:xfrm>
+            <a:off x="502920" y="1325880"/>
+            <a:ext cx="11247120" cy="5029200"/>
+          </a:xfrm>
+          <a:prstGeom prst="rect">
+            <a:avLst/>
+          </a:prstGeom>
+          <a:noFill/>
+        </p:spPr>
+        <p:txBody>
+          <a:bodyPr wrap="square">
+            <a:spAutoFit/>
+          </a:bodyPr>
+          <a:lstStyle/>
+          <a:p>
+            <a:pPr>
+              <a:spcAft>
+                <a:spcPts val="800"/>
+              </a:spcAft>
+            </a:pPr>
+            <a:r>
+              <a:rPr sz="1700" b="0" i="0">
+                <a:solidFill>
+                  <a:srgbClr val="333333"/>
+                </a:solidFill>
+                <a:latin typeface="Droid Sans Fallback"/>
+              </a:rPr>
+              <a:t>P = I₀(R_L − R₀)·δI + c₂·R_L·(δI)²     c₂ = 2（method 1，本报告用的）、1（精确的小信号解）、−1（method 2）</a:t>
+            </a:r>
+          </a:p>
+          <a:p>
+            <a:pPr>
+              <a:spcAft>
+                <a:spcPts val="800"/>
+              </a:spcAft>
+            </a:pPr>
+            <a:r>
+              <a:rPr sz="1700" b="0" i="0">
+                <a:solidFill>
+                  <a:srgbClr val="333333"/>
+                </a:solidFill>
+                <a:latin typeface="Droid Sans Fallback"/>
+              </a:rPr>
+              <a:t>相对精确解：method 1 高 0.58%，method 2 低 1.15% —— 远小于单通道 15% 的宽度和 PDS2 的范围。</a:t>
+            </a:r>
+          </a:p>
+          <a:p>
+            <a:pPr>
+              <a:spcAft>
+                <a:spcPts val="800"/>
+              </a:spcAft>
+            </a:pPr>
+            <a:r>
+              <a:rPr sz="1700" b="0" i="0">
+                <a:solidFill>
+                  <a:srgbClr val="333333"/>
+                </a:solidFill>
+                <a:latin typeface="Droid Sans Fallback"/>
+              </a:rPr>
+              <a:t>完整方程里的电感项需要 L 和 loop gain，要从 dI/dV 来，MSI 上这些 series 没有这个数据；这一项被忽略。</a:t>
+            </a:r>
+          </a:p>
+          <a:p>
+            <a:pPr>
+              <a:spcAft>
+                <a:spcPts val="800"/>
+              </a:spcAft>
+            </a:pPr>
+            <a:r>
+              <a:rPr sz="1700" b="0" i="0">
+                <a:solidFill>
+                  <a:srgbClr val="333333"/>
+                </a:solidFill>
+                <a:latin typeface="Droid Sans Fallback"/>
+              </a:rPr>
+              <a:t>官方 Eabs（触发在第 16383 点，基线是 93..15758 点的平均，5 阶 20 kHz 预滤波，窗口 −0.5/+1 ms，同一个公式）复现到 0.2%；直方图页上的灰色轮廓就是它。</a:t>
+            </a:r>
+          </a:p>
+        </p:txBody>
+      </p:sp>
     </p:spTree>
   </p:cSld>
   <p:clrMapOvr>
@@ -5741,7 +5906,7 @@
                 </a:solidFill>
                 <a:latin typeface="Droid Sans Fallback"/>
               </a:rPr>
-              <a:t>Backup — 15 个事件，累计能量（PBS1）</a:t>
+              <a:t>Backup — 15 个事件，拟合电流和功率（PBS1）</a:t>
             </a:r>
           </a:p>
         </p:txBody>
@@ -5825,7 +5990,7 @@
       </p:sp>
       <p:pic>
         <p:nvPicPr>
-          <p:cNvPr id="5" name="Picture 4" descr="cum_15events.png"/>
+          <p:cNvPr id="5" name="Picture 4" descr="pulse_15events.png"/>
           <p:cNvPicPr>
             <a:picLocks noChangeAspect="1"/>
           </p:cNvPicPr>
@@ -5894,7 +6059,7 @@
                 </a:solidFill>
                 <a:latin typeface="Droid Sans Fallback"/>
               </a:rPr>
-              <a:t>Backup — 事件 30646，全部通道</a:t>
+              <a:t>Backup — 15 个事件，累计能量（PBS1）</a:t>
             </a:r>
           </a:p>
         </p:txBody>
@@ -5978,7 +6143,7 @@
       </p:sp>
       <p:pic>
         <p:nvPicPr>
-          <p:cNvPr id="5" name="Picture 4" descr="allchan_pulses.png"/>
+          <p:cNvPr id="5" name="Picture 4" descr="cum_15events.png"/>
           <p:cNvPicPr>
             <a:picLocks noChangeAspect="1"/>
           </p:cNvPicPr>
@@ -5992,8 +6157,8 @@
         </p:blipFill>
         <p:spPr>
           <a:xfrm>
-            <a:off x="502920" y="1758921"/>
-            <a:ext cx="11247120" cy="4025957"/>
+            <a:off x="2671354" y="1143000"/>
+            <a:ext cx="6910251" cy="5257800"/>
           </a:xfrm>
           <a:prstGeom prst="rect">
             <a:avLst/>
@@ -6047,7 +6212,7 @@
                 </a:solidFill>
                 <a:latin typeface="Droid Sans Fallback"/>
               </a:rPr>
-              <a:t>Backup — 每个通道的能量分布</a:t>
+              <a:t>Backup — 事件 30646，全部通道</a:t>
             </a:r>
           </a:p>
         </p:txBody>
@@ -6125,6 +6290,159 @@
                 <a:latin typeface="Droid Sans Fallback"/>
               </a:rPr>
               <a:t>17</a:t>
+            </a:r>
+          </a:p>
+        </p:txBody>
+      </p:sp>
+      <p:pic>
+        <p:nvPicPr>
+          <p:cNvPr id="5" name="Picture 4" descr="allchan_pulses.png"/>
+          <p:cNvPicPr>
+            <a:picLocks noChangeAspect="1"/>
+          </p:cNvPicPr>
+          <p:nvPr/>
+        </p:nvPicPr>
+        <p:blipFill>
+          <a:blip r:embed="rId3"/>
+          <a:stretch>
+            <a:fillRect/>
+          </a:stretch>
+        </p:blipFill>
+        <p:spPr>
+          <a:xfrm>
+            <a:off x="502920" y="1758921"/>
+            <a:ext cx="11247120" cy="4025957"/>
+          </a:xfrm>
+          <a:prstGeom prst="rect">
+            <a:avLst/>
+          </a:prstGeom>
+        </p:spPr>
+      </p:pic>
+    </p:spTree>
+  </p:cSld>
+  <p:clrMapOvr>
+    <a:masterClrMapping/>
+  </p:clrMapOvr>
+</p:sld>
+</file>
+
+<file path=ppt/slides/slide18.xml><?xml version="1.0" encoding="utf-8"?>
+<p:sld xmlns:a="http://schemas.openxmlformats.org/drawingml/2006/main" xmlns:p="http://schemas.openxmlformats.org/presentationml/2006/main" xmlns:r="http://schemas.openxmlformats.org/officeDocument/2006/relationships">
+  <p:cSld>
+    <p:spTree>
+      <p:nvGrpSpPr>
+        <p:cNvPr id="1" name=""/>
+        <p:cNvGrpSpPr/>
+        <p:nvPr/>
+      </p:nvGrpSpPr>
+      <p:grpSpPr/>
+      <p:sp>
+        <p:nvSpPr>
+          <p:cNvPr id="2" name="TextBox 1"/>
+          <p:cNvSpPr txBox="1"/>
+          <p:nvPr/>
+        </p:nvSpPr>
+        <p:spPr>
+          <a:xfrm>
+            <a:off x="502920" y="228600"/>
+            <a:ext cx="11247120" cy="731520"/>
+          </a:xfrm>
+          <a:prstGeom prst="rect">
+            <a:avLst/>
+          </a:prstGeom>
+          <a:noFill/>
+        </p:spPr>
+        <p:txBody>
+          <a:bodyPr wrap="square">
+            <a:spAutoFit/>
+          </a:bodyPr>
+          <a:lstStyle/>
+          <a:p>
+            <a:r>
+              <a:rPr sz="2700" b="1" i="0">
+                <a:solidFill>
+                  <a:srgbClr val="1F3864"/>
+                </a:solidFill>
+                <a:latin typeface="Droid Sans Fallback"/>
+              </a:rPr>
+              <a:t>Backup — 每个通道的能量分布</a:t>
+            </a:r>
+          </a:p>
+        </p:txBody>
+      </p:sp>
+      <p:sp>
+        <p:nvSpPr>
+          <p:cNvPr id="3" name="Rectangle 2"/>
+          <p:cNvSpPr/>
+          <p:nvPr/>
+        </p:nvSpPr>
+        <p:spPr>
+          <a:xfrm>
+            <a:off x="502920" y="969264"/>
+            <a:ext cx="11247120" cy="18000"/>
+          </a:xfrm>
+          <a:prstGeom prst="rect">
+            <a:avLst/>
+          </a:prstGeom>
+          <a:solidFill>
+            <a:srgbClr val="1F3864"/>
+          </a:solidFill>
+          <a:ln>
+            <a:noFill/>
+          </a:ln>
+        </p:spPr>
+        <p:style>
+          <a:lnRef idx="1">
+            <a:schemeClr val="accent1"/>
+          </a:lnRef>
+          <a:fillRef idx="3">
+            <a:schemeClr val="accent1"/>
+          </a:fillRef>
+          <a:effectRef idx="2">
+            <a:schemeClr val="accent1"/>
+          </a:effectRef>
+          <a:fontRef idx="minor">
+            <a:schemeClr val="lt1"/>
+          </a:fontRef>
+        </p:style>
+        <p:txBody>
+          <a:bodyPr rtlCol="0" anchor="ctr"/>
+          <a:lstStyle/>
+          <a:p>
+            <a:pPr algn="ctr"/>
+          </a:p>
+        </p:txBody>
+      </p:sp>
+      <p:sp>
+        <p:nvSpPr>
+          <p:cNvPr id="4" name="TextBox 3"/>
+          <p:cNvSpPr txBox="1"/>
+          <p:nvPr/>
+        </p:nvSpPr>
+        <p:spPr>
+          <a:xfrm>
+            <a:off x="11430000" y="6446520"/>
+            <a:ext cx="548640" cy="320040"/>
+          </a:xfrm>
+          <a:prstGeom prst="rect">
+            <a:avLst/>
+          </a:prstGeom>
+          <a:noFill/>
+        </p:spPr>
+        <p:txBody>
+          <a:bodyPr wrap="square">
+            <a:spAutoFit/>
+          </a:bodyPr>
+          <a:lstStyle/>
+          <a:p>
+            <a:r>
+              <a:rPr sz="1000" b="0" i="0">
+                <a:solidFill>
+                  <a:srgbClr val="666666"/>
+                </a:solidFill>
+                <a:latin typeface="Droid Sans Fallback"/>
+              </a:rPr>
+              <a:t>18</a:t>
             </a:r>
           </a:p>
         </p:txBody>
@@ -6440,7 +6758,18 @@
                 </a:solidFill>
                 <a:latin typeface="Droid Sans Fallback"/>
               </a:rPr>
-              <a:t>电流 → 功率，功率 → 能量</a:t>
+              <a:t>公式是怎么来的</a:t>
+            </a:r>
+          </a:p>
+          <a:p>
+            <a:r>
+              <a:rPr sz="1400" b="0" i="0">
+                <a:solidFill>
+                  <a:srgbClr val="666666"/>
+                </a:solidFill>
+                <a:latin typeface="Droid Sans Fallback"/>
+              </a:rPr>
+              <a:t>薄膜吸收的能量，是从它自己的焦耳热里“扣掉”的</a:t>
             </a:r>
           </a:p>
         </p:txBody>
@@ -6524,7 +6853,7 @@
       </p:sp>
       <p:pic>
         <p:nvPicPr>
-          <p:cNvPr id="5" name="Picture 4" descr="formula.png"/>
+          <p:cNvPr id="5" name="Picture 4" descr="circuit.png"/>
           <p:cNvPicPr>
             <a:picLocks noChangeAspect="1"/>
           </p:cNvPicPr>
@@ -6538,24 +6867,48 @@
         </p:blipFill>
         <p:spPr>
           <a:xfrm>
-            <a:off x="997889" y="1143000"/>
-            <a:ext cx="10257182" cy="3931920"/>
+            <a:off x="502920" y="1595301"/>
+            <a:ext cx="4434840" cy="3484517"/>
           </a:xfrm>
           <a:prstGeom prst="rect">
             <a:avLst/>
           </a:prstGeom>
         </p:spPr>
       </p:pic>
-      <p:sp>
-        <p:nvSpPr>
-          <p:cNvPr id="6" name="TextBox 5"/>
+      <p:pic>
+        <p:nvPicPr>
+          <p:cNvPr id="6" name="Picture 5" descr="derivation.png"/>
+          <p:cNvPicPr>
+            <a:picLocks noChangeAspect="1"/>
+          </p:cNvPicPr>
+          <p:nvPr/>
+        </p:nvPicPr>
+        <p:blipFill>
+          <a:blip r:embed="rId4"/>
+          <a:stretch>
+            <a:fillRect/>
+          </a:stretch>
+        </p:blipFill>
+        <p:spPr>
+          <a:xfrm>
+            <a:off x="5120640" y="1179151"/>
+            <a:ext cx="6629400" cy="4316818"/>
+          </a:xfrm>
+          <a:prstGeom prst="rect">
+            <a:avLst/>
+          </a:prstGeom>
+        </p:spPr>
+      </p:pic>
+      <p:sp>
+        <p:nvSpPr>
+          <p:cNvPr id="7" name="TextBox 6"/>
           <p:cNvSpPr txBox="1"/>
           <p:nvPr/>
         </p:nvSpPr>
         <p:spPr>
           <a:xfrm>
-            <a:off x="502920" y="5166360"/>
-            <a:ext cx="11247120" cy="1371600"/>
+            <a:off x="502920" y="5669280"/>
+            <a:ext cx="11247120" cy="1097280"/>
           </a:xfrm>
           <a:prstGeom prst="rect">
             <a:avLst/>
@@ -6574,13 +6927,13 @@
               </a:spcAft>
             </a:pPr>
             <a:r>
-              <a:rPr sz="1600" b="0" i="0">
+              <a:rPr sz="1300" b="0" i="0">
                 <a:solidFill>
                   <a:srgbClr val="333333"/>
                 </a:solidFill>
                 <a:latin typeface="Droid Sans Fallback"/>
               </a:rPr>
-              <a:t>功率 = 电流变化 δI 之后焦耳热的变化量：一个线性项，加一个很小的二次项。</a:t>
+              <a:t>事件把薄膜加热，电阻升高，电流下降 —— 焦耳热正好少掉事件送进来的那一份（负电热反馈）。</a:t>
             </a:r>
           </a:p>
           <a:p>
@@ -6590,13 +6943,29 @@
               </a:spcAft>
             </a:pPr>
             <a:r>
-              <a:rPr sz="1600" b="1" i="0">
+              <a:rPr sz="1300" b="1" i="0">
                 <a:solidFill>
                   <a:srgbClr val="C0392B"/>
                 </a:solidFill>
                 <a:latin typeface="Droid Sans Fallback"/>
               </a:rPr>
-              <a:t>拟合出双指数，从 −∞ 积到 +∞：能量就是 A、τ_f、τ_r 的一个公式。</a:t>
+              <a:t>所以吸收的能量完全可以从电流读出来：E = −∫δP_J dt，也就是下一页那个公式。</a:t>
+            </a:r>
+          </a:p>
+          <a:p>
+            <a:pPr>
+              <a:spcAft>
+                <a:spcPts val="800"/>
+              </a:spcAft>
+            </a:pPr>
+            <a:r>
+              <a:rPr sz="1300" b="0" i="0">
+                <a:solidFill>
+                  <a:srgbClr val="333333"/>
+                </a:solidFill>
+                <a:latin typeface="Droid Sans Fallback"/>
+              </a:rPr>
+              <a:t>没有算进去的：热泄漏项和电感边界项。两者都需要 dI/dV 给出的 G 和 L，这些 series 没有这个数据。</a:t>
             </a:r>
           </a:p>
         </p:txBody>
@@ -6648,18 +7017,7 @@
                 </a:solidFill>
                 <a:latin typeface="Droid Sans Fallback"/>
               </a:rPr>
-              <a:t>一个脉冲，三种读法</a:t>
-            </a:r>
-          </a:p>
-          <a:p>
-            <a:r>
-              <a:rPr sz="1400" b="0" i="0">
-                <a:solidFill>
-                  <a:srgbClr val="666666"/>
-                </a:solidFill>
-                <a:latin typeface="Droid Sans Fallback"/>
-              </a:rPr>
-              <a:t>Z7 PBS1，事件 30646：同一条波形，读成 ADC 计数、读成电流、读成功率</a:t>
+              <a:t>公式和它需要的两个数</a:t>
             </a:r>
           </a:p>
         </p:txBody>
@@ -6743,7 +7101,7 @@
       </p:sp>
       <p:pic>
         <p:nvPicPr>
-          <p:cNvPr id="5" name="Picture 4" descr="peak_full.png"/>
+          <p:cNvPr id="5" name="Picture 4" descr="formula.png"/>
           <p:cNvPicPr>
             <a:picLocks noChangeAspect="1"/>
           </p:cNvPicPr>
@@ -6757,14 +7115,69 @@
         </p:blipFill>
         <p:spPr>
           <a:xfrm>
-            <a:off x="2713966" y="1143000"/>
-            <a:ext cx="6825028" cy="5257800"/>
+            <a:off x="997889" y="1143000"/>
+            <a:ext cx="10257182" cy="3931920"/>
           </a:xfrm>
           <a:prstGeom prst="rect">
             <a:avLst/>
           </a:prstGeom>
         </p:spPr>
       </p:pic>
+      <p:sp>
+        <p:nvSpPr>
+          <p:cNvPr id="6" name="TextBox 5"/>
+          <p:cNvSpPr txBox="1"/>
+          <p:nvPr/>
+        </p:nvSpPr>
+        <p:spPr>
+          <a:xfrm>
+            <a:off x="502920" y="5166360"/>
+            <a:ext cx="11247120" cy="1371600"/>
+          </a:xfrm>
+          <a:prstGeom prst="rect">
+            <a:avLst/>
+          </a:prstGeom>
+          <a:noFill/>
+        </p:spPr>
+        <p:txBody>
+          <a:bodyPr wrap="square">
+            <a:spAutoFit/>
+          </a:bodyPr>
+          <a:lstStyle/>
+          <a:p>
+            <a:pPr>
+              <a:spcAft>
+                <a:spcPts val="800"/>
+              </a:spcAft>
+            </a:pPr>
+            <a:r>
+              <a:rPr sz="1600" b="0" i="0">
+                <a:solidFill>
+                  <a:srgbClr val="333333"/>
+                </a:solidFill>
+                <a:latin typeface="Droid Sans Fallback"/>
+              </a:rPr>
+              <a:t>功率 = 电流变化 δI 之后焦耳热的变化量：一个线性项，加一个很小的二次项。</a:t>
+            </a:r>
+          </a:p>
+          <a:p>
+            <a:pPr>
+              <a:spcAft>
+                <a:spcPts val="800"/>
+              </a:spcAft>
+            </a:pPr>
+            <a:r>
+              <a:rPr sz="1600" b="1" i="0">
+                <a:solidFill>
+                  <a:srgbClr val="C0392B"/>
+                </a:solidFill>
+                <a:latin typeface="Droid Sans Fallback"/>
+              </a:rPr>
+              <a:t>拟合出双指数，从 −∞ 积到 +∞：能量就是 A、τ_f、τ_r 的一个公式。</a:t>
+            </a:r>
+          </a:p>
+        </p:txBody>
+      </p:sp>
     </p:spTree>
   </p:cSld>
   <p:clrMapOvr>
@@ -6812,7 +7225,18 @@
                 </a:solidFill>
                 <a:latin typeface="Droid Sans Fallback"/>
               </a:rPr>
-              <a:t>脉冲高度：从拟合取，不从最大的采样点取</a:t>
+              <a:t>一个脉冲，三种读法</a:t>
+            </a:r>
+          </a:p>
+          <a:p>
+            <a:r>
+              <a:rPr sz="1400" b="0" i="0">
+                <a:solidFill>
+                  <a:srgbClr val="666666"/>
+                </a:solidFill>
+                <a:latin typeface="Droid Sans Fallback"/>
+              </a:rPr>
+              <a:t>Z7 PBS1，事件 30646：同一条波形，读成 ADC 计数、读成电流、读成功率</a:t>
             </a:r>
           </a:p>
         </p:txBody>
@@ -6896,7 +7320,7 @@
       </p:sp>
       <p:pic>
         <p:nvPicPr>
-          <p:cNvPr id="5" name="Picture 4" descr="peak_top.png"/>
+          <p:cNvPr id="5" name="Picture 4" descr="peak_full.png"/>
           <p:cNvPicPr>
             <a:picLocks noChangeAspect="1"/>
           </p:cNvPicPr>
@@ -6910,69 +7334,14 @@
         </p:blipFill>
         <p:spPr>
           <a:xfrm>
-            <a:off x="1077759" y="1143000"/>
-            <a:ext cx="10097441" cy="4160520"/>
+            <a:off x="2713966" y="1143000"/>
+            <a:ext cx="6825028" cy="5257800"/>
           </a:xfrm>
           <a:prstGeom prst="rect">
             <a:avLst/>
           </a:prstGeom>
         </p:spPr>
       </p:pic>
-      <p:sp>
-        <p:nvSpPr>
-          <p:cNvPr id="6" name="TextBox 5"/>
-          <p:cNvSpPr txBox="1"/>
-          <p:nvPr/>
-        </p:nvSpPr>
-        <p:spPr>
-          <a:xfrm>
-            <a:off x="502920" y="5394960"/>
-            <a:ext cx="11247120" cy="1097280"/>
-          </a:xfrm>
-          <a:prstGeom prst="rect">
-            <a:avLst/>
-          </a:prstGeom>
-          <a:noFill/>
-        </p:spPr>
-        <p:txBody>
-          <a:bodyPr wrap="square">
-            <a:spAutoFit/>
-          </a:bodyPr>
-          <a:lstStyle/>
-          <a:p>
-            <a:pPr>
-              <a:spcAft>
-                <a:spcPts val="800"/>
-              </a:spcAft>
-            </a:pPr>
-            <a:r>
-              <a:rPr sz="1600" b="0" i="0">
-                <a:solidFill>
-                  <a:srgbClr val="333333"/>
-                </a:solidFill>
-                <a:latin typeface="Droid Sans Fallback"/>
-              </a:rPr>
-              <a:t>黄色竖带：98 个采样点都在峰高的 10% 以内。其中最大的那个，就是噪声往上跳得最多的那个。</a:t>
-            </a:r>
-          </a:p>
-          <a:p>
-            <a:pPr>
-              <a:spcAft>
-                <a:spcPts val="800"/>
-              </a:spcAft>
-            </a:pPr>
-            <a:r>
-              <a:rPr sz="1600" b="1" i="0">
-                <a:solidFill>
-                  <a:srgbClr val="C0392B"/>
-                </a:solidFill>
-                <a:latin typeface="Droid Sans Fallback"/>
-              </a:rPr>
-              <a:t>原始数据最大值 885 ADC，拟合峰值 717 ADC：取最大值偏高 23%。滤波能减轻，拟合能消除。</a:t>
-            </a:r>
-          </a:p>
-        </p:txBody>
-      </p:sp>
     </p:spTree>
   </p:cSld>
   <p:clrMapOvr>
@@ -7020,7 +7389,7 @@
                 </a:solidFill>
                 <a:latin typeface="Droid Sans Fallback"/>
               </a:rPr>
-              <a:t>功率脉冲，它的面积就是能量</a:t>
+              <a:t>脉冲高度：从拟合取，不从最大的采样点取</a:t>
             </a:r>
           </a:p>
         </p:txBody>
@@ -7104,7 +7473,7 @@
       </p:sp>
       <p:pic>
         <p:nvPicPr>
-          <p:cNvPr id="5" name="Picture 4" descr="peak_bottom.png"/>
+          <p:cNvPr id="5" name="Picture 4" descr="peak_top.png"/>
           <p:cNvPicPr>
             <a:picLocks noChangeAspect="1"/>
           </p:cNvPicPr>
@@ -7118,8 +7487,8 @@
         </p:blipFill>
         <p:spPr>
           <a:xfrm>
-            <a:off x="502920" y="1213485"/>
-            <a:ext cx="11247120" cy="2967990"/>
+            <a:off x="1077759" y="1143000"/>
+            <a:ext cx="10097441" cy="4160520"/>
           </a:xfrm>
           <a:prstGeom prst="rect">
             <a:avLst/>
@@ -7134,8 +7503,8 @@
         </p:nvSpPr>
         <p:spPr>
           <a:xfrm>
-            <a:off x="502920" y="4389120"/>
-            <a:ext cx="11247120" cy="2011680"/>
+            <a:off x="502920" y="5394960"/>
+            <a:ext cx="11247120" cy="1097280"/>
           </a:xfrm>
           <a:prstGeom prst="rect">
             <a:avLst/>
@@ -7160,7 +7529,7 @@
                 </a:solidFill>
                 <a:latin typeface="Droid Sans Fallback"/>
               </a:rPr>
-              <a:t>红线：拟合出的电流代进公式。蓝色虚线：只有线性项。紫色点线：只有二次项，放大 20 倍。</a:t>
+              <a:t>黄色竖带：98 个采样点都在峰高的 10% 以内。其中最大的那个，就是噪声往上跳得最多的那个。</a:t>
             </a:r>
           </a:p>
           <a:p>
@@ -7176,23 +7545,7 @@
                 </a:solidFill>
                 <a:latin typeface="Droid Sans Fallback"/>
               </a:rPr>
-              <a:t>二次项只占峰值的 1.9% —— 功率脉冲的形状和电流脉冲一样。</a:t>
-            </a:r>
-          </a:p>
-          <a:p>
-            <a:pPr>
-              <a:spcAft>
-                <a:spcPts val="800"/>
-              </a:spcAft>
-            </a:pPr>
-            <a:r>
-              <a:rPr sz="1600" b="1" i="0">
-                <a:solidFill>
-                  <a:srgbClr val="C0392B"/>
-                </a:solidFill>
-                <a:latin typeface="Droid Sans Fallback"/>
-              </a:rPr>
-              <a:t>粉色面积就是这个通道吸收的能量：305 eV。</a:t>
+              <a:t>原始数据最大值 885 ADC，拟合峰值 717 ADC：取最大值偏高 23%。滤波能减轻，拟合能消除。</a:t>
             </a:r>
           </a:p>
         </p:txBody>
@@ -7244,18 +7597,7 @@
                 </a:solidFill>
                 <a:latin typeface="Droid Sans Fallback"/>
               </a:rPr>
-              <a:t>为什么积分的是拟合脉冲，不是原始数据</a:t>
-            </a:r>
-          </a:p>
-          <a:p>
-            <a:r>
-              <a:rPr sz="1400" b="0" i="0">
-                <a:solidFill>
-                  <a:srgbClr val="666666"/>
-                </a:solidFill>
-                <a:latin typeface="Droid Sans Fallback"/>
-              </a:rPr>
-              <a:t>从 52 ms 波形的开头一路累计的能量；触发在点线处</a:t>
+              <a:t>功率脉冲，它的面积就是能量</a:t>
             </a:r>
           </a:p>
         </p:txBody>
@@ -7339,7 +7681,7 @@
       </p:sp>
       <p:pic>
         <p:nvPicPr>
-          <p:cNvPr id="5" name="Picture 4" descr="cum_slide.png"/>
+          <p:cNvPr id="5" name="Picture 4" descr="peak_bottom.png"/>
           <p:cNvPicPr>
             <a:picLocks noChangeAspect="1"/>
           </p:cNvPicPr>
@@ -7353,8 +7695,8 @@
         </p:blipFill>
         <p:spPr>
           <a:xfrm>
-            <a:off x="502920" y="1413509"/>
-            <a:ext cx="11247120" cy="3436620"/>
+            <a:off x="502920" y="1213485"/>
+            <a:ext cx="11247120" cy="2967990"/>
           </a:xfrm>
           <a:prstGeom prst="rect">
             <a:avLst/>
@@ -7369,8 +7711,8 @@
         </p:nvSpPr>
         <p:spPr>
           <a:xfrm>
-            <a:off x="502920" y="5257800"/>
-            <a:ext cx="11247120" cy="1234440"/>
+            <a:off x="502920" y="4389120"/>
+            <a:ext cx="11247120" cy="2011680"/>
           </a:xfrm>
           <a:prstGeom prst="rect">
             <a:avLst/>
@@ -7389,13 +7731,13 @@
               </a:spcAft>
             </a:pPr>
             <a:r>
-              <a:rPr sz="1500" b="0" i="0">
+              <a:rPr sz="1600" b="0" i="0">
                 <a:solidFill>
                   <a:srgbClr val="333333"/>
                 </a:solidFill>
                 <a:latin typeface="Droid Sans Fallback"/>
               </a:rPr>
-              <a:t>红线，来自拟合：脉冲之前是 0，1 ms 之内升上去，之后保持水平 —— 终点正好等于公式算出的值。</a:t>
+              <a:t>红线：拟合出的电流代进公式。蓝色虚线：只有线性项。紫色点线：只有二次项，放大 20 倍。</a:t>
             </a:r>
           </a:p>
           <a:p>
@@ -7405,13 +7747,29 @@
               </a:spcAft>
             </a:pPr>
             <a:r>
-              <a:rPr sz="1500" b="1" i="0">
+              <a:rPr sz="1600" b="1" i="0">
                 <a:solidFill>
                   <a:srgbClr val="C0392B"/>
                 </a:solidFill>
                 <a:latin typeface="Droid Sans Fallback"/>
               </a:rPr>
-              <a:t>灰线，来自原始波形：一直在漂。基线偏 1 nA，15 ms 积下来就是 42 eV。右图：拟合 277 eV，原始波形 −169 eV。</a:t>
+              <a:t>二次项只占峰值的 1.9% —— 功率脉冲的形状和电流脉冲一样。</a:t>
+            </a:r>
+          </a:p>
+          <a:p>
+            <a:pPr>
+              <a:spcAft>
+                <a:spcPts val="800"/>
+              </a:spcAft>
+            </a:pPr>
+            <a:r>
+              <a:rPr sz="1600" b="1" i="0">
+                <a:solidFill>
+                  <a:srgbClr val="C0392B"/>
+                </a:solidFill>
+                <a:latin typeface="Droid Sans Fallback"/>
+              </a:rPr>
+              <a:t>粉色面积就是这个通道吸收的能量：305 eV。</a:t>
             </a:r>
           </a:p>
         </p:txBody>
@@ -7463,18 +7821,7 @@
                 </a:solidFill>
                 <a:latin typeface="Droid Sans Fallback"/>
               </a:rPr>
-              <a:t>同一个事件的其他通道：加起来是 33%</a:t>
-            </a:r>
-          </a:p>
-          <a:p>
-            <a:r>
-              <a:rPr sz="1400" b="0" i="0">
-                <a:solidFill>
-                  <a:srgbClr val="666666"/>
-                </a:solidFill>
-                <a:latin typeface="Droid Sans Fallback"/>
-              </a:rPr>
-              <a:t>Z7 事件 30646；11 个通道里的 4 个</a:t>
+              <a:t>为什么积分的是拟合脉冲，不是原始数据</a:t>
             </a:r>
           </a:p>
         </p:txBody>
@@ -7558,7 +7905,7 @@
       </p:sp>
       <p:pic>
         <p:nvPicPr>
-          <p:cNvPr id="5" name="Picture 4" descr="allchan_slide.png"/>
+          <p:cNvPr id="5" name="Picture 4" descr="cum_slide.png"/>
           <p:cNvPicPr>
             <a:picLocks noChangeAspect="1"/>
           </p:cNvPicPr>
@@ -7572,8 +7919,8 @@
         </p:blipFill>
         <p:spPr>
           <a:xfrm>
-            <a:off x="1941141" y="1143000"/>
-            <a:ext cx="8370678" cy="4069080"/>
+            <a:off x="502920" y="1413509"/>
+            <a:ext cx="11247120" cy="3436620"/>
           </a:xfrm>
           <a:prstGeom prst="rect">
             <a:avLst/>
@@ -7589,7 +7936,7 @@
         <p:spPr>
           <a:xfrm>
             <a:off x="502920" y="5257800"/>
-            <a:ext cx="11247120" cy="1188720"/>
+            <a:ext cx="11247120" cy="1234440"/>
           </a:xfrm>
           <a:prstGeom prst="rect">
             <a:avLst/>
@@ -7614,7 +7961,7 @@
                 </a:solidFill>
                 <a:latin typeface="Droid Sans Fallback"/>
               </a:rPr>
-              <a:t>各通道分到的能量很不均匀（PES1 489 eV，PES2 195 eV）：事件发生的位置更靠近一侧。</a:t>
+              <a:t>红线，来自拟合：脉冲之前是 0，1 ms 之内升上去，之后保持水平 —— 终点正好等于公式算出的值。</a:t>
             </a:r>
           </a:p>
           <a:p>
@@ -7630,7 +7977,7 @@
                 </a:solidFill>
                 <a:latin typeface="Droid Sans Fallback"/>
               </a:rPr>
-              <a:t>11 个通道加起来：3419 eV = 10.37 keV 的 33.0%。   PDS2（右下）有一个缓慢的大起伏 —— 记住它。</a:t>
+              <a:t>灰线，来自原始波形：一直在漂。基线偏 1 nA，15 ms 积下来就是 42 eV。右图：拟合 277 eV，原始波形 −169 eV。</a:t>
             </a:r>
           </a:p>
         </p:txBody>
@@ -7682,7 +8029,7 @@
                 </a:solidFill>
                 <a:latin typeface="Droid Sans Fallback"/>
               </a:rPr>
-              <a:t>现在看所有事件：一个通道给出又宽又歪的分布</a:t>
+              <a:t>同一个事件的其他通道：加起来是 33%</a:t>
             </a:r>
           </a:p>
           <a:p>
@@ -7693,7 +8040,7 @@
                 </a:solidFill>
                 <a:latin typeface="Droid Sans Fallback"/>
               </a:rPr>
-              <a:t>PBS1，1917 个 K 线事件，每个事件一次拟合、一次积分</a:t>
+              <a:t>Z7 事件 30646；11 个通道里的 4 个</a:t>
             </a:r>
           </a:p>
         </p:txBody>
@@ -7777,7 +8124,7 @@
       </p:sp>
       <p:pic>
         <p:nvPicPr>
-          <p:cNvPr id="5" name="Picture 4" descr="hist_PBS1.png"/>
+          <p:cNvPr id="5" name="Picture 4" descr="allchan_slide.png"/>
           <p:cNvPicPr>
             <a:picLocks noChangeAspect="1"/>
           </p:cNvPicPr>
@@ -7791,8 +8138,8 @@
         </p:blipFill>
         <p:spPr>
           <a:xfrm>
-            <a:off x="502920" y="1412748"/>
-            <a:ext cx="7863840" cy="4718304"/>
+            <a:off x="1941141" y="1143000"/>
+            <a:ext cx="8370678" cy="4069080"/>
           </a:xfrm>
           <a:prstGeom prst="rect">
             <a:avLst/>
@@ -7807,8 +8154,8 @@
         </p:nvSpPr>
         <p:spPr>
           <a:xfrm>
-            <a:off x="8549640" y="1463040"/>
-            <a:ext cx="3291840" cy="4572000"/>
+            <a:off x="502920" y="5257800"/>
+            <a:ext cx="11247120" cy="1188720"/>
           </a:xfrm>
           <a:prstGeom prst="rect">
             <a:avLst/>
@@ -7833,7 +8180,7 @@
                 </a:solidFill>
                 <a:latin typeface="Droid Sans Fallback"/>
               </a:rPr>
-              <a:t>红色：来自拟合。灰色：官方窗口在原始波形上算的。峰位只差 0.2%。</a:t>
+              <a:t>各通道分到的能量很不均匀（PES1 489 eV，PES2 195 eV）：事件发生的位置更靠近一侧。</a:t>
             </a:r>
           </a:p>
           <a:p>
@@ -7849,39 +8196,7 @@
                 </a:solidFill>
                 <a:latin typeface="Droid Sans Fallback"/>
               </a:rPr>
-              <a:t>峰 285 eV，宽度 15% —— 这可是一条能量固定的谱线。</a:t>
-            </a:r>
-          </a:p>
-          <a:p>
-            <a:pPr>
-              <a:spcAft>
-                <a:spcPts val="800"/>
-              </a:spcAft>
-            </a:pPr>
-            <a:r>
-              <a:rPr sz="1500" b="0" i="0">
-                <a:solidFill>
-                  <a:srgbClr val="333333"/>
-                </a:solidFill>
-                <a:latin typeface="Droid Sans Fallback"/>
-              </a:rPr>
-              <a:t>往右拖的尾巴，是发生在这个通道附近的事件。</a:t>
-            </a:r>
-          </a:p>
-          <a:p>
-            <a:pPr>
-              <a:spcAft>
-                <a:spcPts val="800"/>
-              </a:spcAft>
-            </a:pPr>
-            <a:r>
-              <a:rPr sz="1500" b="1" i="0">
-                <a:solidFill>
-                  <a:srgbClr val="C0392B"/>
-                </a:solidFill>
-                <a:latin typeface="Droid Sans Fallback"/>
-              </a:rPr>
-              <a:t>单通道的宽度是事件位置，不是噪声。</a:t>
+              <a:t>11 个通道加起来：3419 eV = 10.37 keV 的 33.0%。   PDS2（右下）有一个缓慢的大起伏 —— 记住它。</a:t>
             </a:r>
           </a:p>
         </p:txBody>

--- a/snolab/collection_efficiency/presentation/SNOLAB_R4_collection_efficiency_20260910_zh.pptx
+++ b/snolab/collection_efficiency/presentation/SNOLAB_R4_collection_efficiency_20260910_zh.pptx
@@ -5806,7 +5806,7 @@
                 </a:solidFill>
                 <a:latin typeface="Droid Sans Fallback"/>
               </a:rPr>
-              <a:t>P = I₀(R_L − R₀)·δI + c₂·R_L·(δI)²     c₂ = 2（method 1，本报告用的）、1（精确的小信号解）、−1（method 2）</a:t>
+              <a:t>δP = I₀(R_L − R₀)·δI + c₂·R_L·(δI)²     c₂ = 2（method 1，本报告用的）、1（精确的小信号解）、−1（method 2）</a:t>
             </a:r>
           </a:p>
           <a:p>
@@ -6652,13 +6652,13 @@
               </a:spcAft>
             </a:pPr>
             <a:r>
-              <a:rPr sz="1800" b="0" i="0">
-                <a:solidFill>
-                  <a:srgbClr val="333333"/>
+              <a:rPr sz="1800" b="1" i="0">
+                <a:solidFill>
+                  <a:srgbClr val="C0392B"/>
                 </a:solidFill>
                 <a:latin typeface="Droid Sans Fallback"/>
               </a:rPr>
-              <a:t>收集效率  =  到达 TES 薄膜的能量  ÷  事件放进晶体的 10.37 keV</a:t>
+              <a:t>对于在 0 V 下工作的探测器（没有 NTL 效应）：</a:t>
             </a:r>
           </a:p>
           <a:p>
@@ -6674,7 +6674,7 @@
                 </a:solidFill>
                 <a:latin typeface="Droid Sans Fallback"/>
               </a:rPr>
-              <a:t>我们记录下来的是一条电流脉冲。</a:t>
+              <a:t>收集效率  =  TES 吸收的能量（所有通道求和）  ÷  事件放进晶体的 10.37 keV</a:t>
             </a:r>
           </a:p>
           <a:p>
@@ -6684,29 +6684,13 @@
               </a:spcAft>
             </a:pPr>
             <a:r>
-              <a:rPr sz="1800" b="1" i="0">
-                <a:solidFill>
-                  <a:srgbClr val="C0392B"/>
+              <a:rPr sz="1800" b="0" i="0">
+                <a:solidFill>
+                  <a:srgbClr val="333333"/>
                 </a:solidFill>
                 <a:latin typeface="Droid Sans Fallback"/>
               </a:rPr>
-              <a:t>电流曲线下面的面积不是能量 —— 所以必须先把脉冲换成功率。</a:t>
-            </a:r>
-          </a:p>
-          <a:p>
-            <a:pPr>
-              <a:spcAft>
-                <a:spcPts val="800"/>
-              </a:spcAft>
-            </a:pPr>
-            <a:r>
-              <a:rPr sz="1800" b="0" i="0">
-                <a:solidFill>
-                  <a:srgbClr val="333333"/>
-                </a:solidFill>
-                <a:latin typeface="Droid Sans Fallback"/>
-              </a:rPr>
-              <a:t>样本：Z7，Ge 活化的 K 线事件（2207 个事件，30 个 series，11 个通道的原始波形全部保存）。</a:t>
+              <a:t>样本：Z7，Ge 活化的 K 线事件，来自 SNOLAB R4（2207 个事件，30 个 series，11 个通道）。</a:t>
             </a:r>
           </a:p>
         </p:txBody>
@@ -7157,23 +7141,7 @@
                 </a:solidFill>
                 <a:latin typeface="Droid Sans Fallback"/>
               </a:rPr>
-              <a:t>功率 = 电流变化 δI 之后焦耳热的变化量：一个线性项，加一个很小的二次项。</a:t>
-            </a:r>
-          </a:p>
-          <a:p>
-            <a:pPr>
-              <a:spcAft>
-                <a:spcPts val="800"/>
-              </a:spcAft>
-            </a:pPr>
-            <a:r>
-              <a:rPr sz="1600" b="1" i="0">
-                <a:solidFill>
-                  <a:srgbClr val="C0392B"/>
-                </a:solidFill>
-                <a:latin typeface="Droid Sans Fallback"/>
-              </a:rPr>
-              <a:t>拟合出双指数，从 −∞ 积到 +∞：能量就是 A、τ_f、τ_r 的一个公式。</a:t>
+              <a:t>δP = 电流变化 δI 之后焦耳热的变化量：一个线性项，加一个很小的二次项。</a:t>
             </a:r>
           </a:p>
         </p:txBody>
@@ -7225,7 +7193,7 @@
                 </a:solidFill>
                 <a:latin typeface="Droid Sans Fallback"/>
               </a:rPr>
-              <a:t>一个脉冲，三种读法</a:t>
+              <a:t>例子：一个脉冲</a:t>
             </a:r>
           </a:p>
           <a:p>
@@ -7236,7 +7204,16 @@
                 </a:solidFill>
                 <a:latin typeface="Droid Sans Fallback"/>
               </a:rPr>
-              <a:t>Z7 PBS1，事件 30646：同一条波形，读成 ADC 计数、读成电流、读成功率</a:t>
+              <a:t>Z7 PBS1，事件 30646：  </a:t>
+            </a:r>
+            <a:r>
+              <a:rPr sz="1400" b="1" i="0">
+                <a:solidFill>
+                  <a:srgbClr val="333333"/>
+                </a:solidFill>
+                <a:latin typeface="Droid Sans Fallback"/>
+              </a:rPr>
+              <a:t>同一条波形，读成 ADC 计数、读成电流、读成功率</a:t>
             </a:r>
           </a:p>
         </p:txBody>
@@ -7334,14 +7311,53 @@
         </p:blipFill>
         <p:spPr>
           <a:xfrm>
-            <a:off x="2713966" y="1143000"/>
-            <a:ext cx="6825028" cy="5257800"/>
+            <a:off x="2981032" y="1143000"/>
+            <a:ext cx="6290896" cy="4846320"/>
           </a:xfrm>
           <a:prstGeom prst="rect">
             <a:avLst/>
           </a:prstGeom>
         </p:spPr>
       </p:pic>
+      <p:sp>
+        <p:nvSpPr>
+          <p:cNvPr id="6" name="TextBox 5"/>
+          <p:cNvSpPr txBox="1"/>
+          <p:nvPr/>
+        </p:nvSpPr>
+        <p:spPr>
+          <a:xfrm>
+            <a:off x="502920" y="6053328"/>
+            <a:ext cx="11247120" cy="457200"/>
+          </a:xfrm>
+          <a:prstGeom prst="rect">
+            <a:avLst/>
+          </a:prstGeom>
+          <a:noFill/>
+        </p:spPr>
+        <p:txBody>
+          <a:bodyPr wrap="square">
+            <a:spAutoFit/>
+          </a:bodyPr>
+          <a:lstStyle/>
+          <a:p>
+            <a:pPr>
+              <a:spcAft>
+                <a:spcPts val="800"/>
+              </a:spcAft>
+            </a:pPr>
+            <a:r>
+              <a:rPr sz="1400" b="1" i="0">
+                <a:solidFill>
+                  <a:srgbClr val="C0392B"/>
+                </a:solidFill>
+                <a:latin typeface="Droid Sans Fallback"/>
+              </a:rPr>
+              <a:t>双指数拟合用的是 100 kHz 低通之后的波形（蓝线），不是原始采样点；原始采样点只是画出来对照。</a:t>
+            </a:r>
+          </a:p>
+        </p:txBody>
+      </p:sp>
     </p:spTree>
   </p:cSld>
   <p:clrMapOvr>
@@ -7905,7 +7921,7 @@
       </p:sp>
       <p:pic>
         <p:nvPicPr>
-          <p:cNvPr id="5" name="Picture 4" descr="cum_slide.png"/>
+          <p:cNvPr id="5" name="Picture 4" descr="raw_cum_slide.png"/>
           <p:cNvPicPr>
             <a:picLocks noChangeAspect="1"/>
           </p:cNvPicPr>
@@ -7919,8 +7935,8 @@
         </p:blipFill>
         <p:spPr>
           <a:xfrm>
-            <a:off x="502920" y="1413509"/>
-            <a:ext cx="11247120" cy="3436620"/>
+            <a:off x="1751798" y="1143000"/>
+            <a:ext cx="8749364" cy="4617720"/>
           </a:xfrm>
           <a:prstGeom prst="rect">
             <a:avLst/>
@@ -7935,8 +7951,8 @@
         </p:nvSpPr>
         <p:spPr>
           <a:xfrm>
-            <a:off x="502920" y="5257800"/>
-            <a:ext cx="11247120" cy="1234440"/>
+            <a:off x="502920" y="5788152"/>
+            <a:ext cx="11247120" cy="822960"/>
           </a:xfrm>
           <a:prstGeom prst="rect">
             <a:avLst/>
@@ -7955,13 +7971,13 @@
               </a:spcAft>
             </a:pPr>
             <a:r>
-              <a:rPr sz="1500" b="0" i="0">
+              <a:rPr sz="1300" b="0" i="0">
                 <a:solidFill>
                   <a:srgbClr val="333333"/>
                 </a:solidFill>
                 <a:latin typeface="Droid Sans Fallback"/>
               </a:rPr>
-              <a:t>红线，来自拟合：脉冲之前是 0，1 ms 之内升上去，之后保持水平 —— 终点正好等于公式算出的值。</a:t>
+              <a:t>上：这两个事件的原始电流，纵轴放大到基线附近。下：由它累计的能量（灰）和由拟合累计的能量（红）。</a:t>
             </a:r>
           </a:p>
           <a:p>
@@ -7971,13 +7987,13 @@
               </a:spcAft>
             </a:pPr>
             <a:r>
-              <a:rPr sz="1500" b="1" i="0">
+              <a:rPr sz="1300" b="1" i="0">
                 <a:solidFill>
                   <a:srgbClr val="C0392B"/>
                 </a:solidFill>
                 <a:latin typeface="Droid Sans Fallback"/>
               </a:rPr>
-              <a:t>灰线，来自原始波形：一直在漂。基线偏 1 nA，15 ms 积下来就是 42 eV。右图：拟合 277 eV，原始波形 −169 eV。</a:t>
+              <a:t>右：脉冲过后电流比基线低 6 nA —— 埋在 28 nA 的噪声里看不出来，但 24 ms 积下来就是 −420 eV：原始 −169 eV，拟合 277 eV。</a:t>
             </a:r>
           </a:p>
         </p:txBody>
@@ -8196,7 +8212,7 @@
                 </a:solidFill>
                 <a:latin typeface="Droid Sans Fallback"/>
               </a:rPr>
-              <a:t>11 个通道加起来：3419 eV = 10.37 keV 的 33.0%。   PDS2（右下）有一个缓慢的大起伏 —— 记住它。</a:t>
+              <a:t>11 个通道加起来：3419 eV = 10.37 keV 的 33.0%。   PDS2（右下）有一个缓慢的大起伏。</a:t>
             </a:r>
           </a:p>
         </p:txBody>

--- a/snolab/collection_efficiency/presentation/SNOLAB_R4_collection_efficiency_20260910_zh.pptx
+++ b/snolab/collection_efficiency/presentation/SNOLAB_R4_collection_efficiency_20260910_zh.pptx
@@ -22,7 +22,6 @@
     <p:sldId id="270" r:id="rId22"/>
     <p:sldId id="271" r:id="rId23"/>
     <p:sldId id="272" r:id="rId24"/>
-    <p:sldId id="273" r:id="rId25"/>
   </p:sldIdLst>
   <p:sldSz cx="12191695" cy="6858000" type="screen4x3"/>
   <p:notesSz cx="6858000" cy="9144000"/>
@@ -1003,72 +1002,6 @@
 </file>
 
 <file path=ppt/notesSlides/notesSlide17.xml><?xml version="1.0" encoding="utf-8"?>
-<p:notes xmlns:a="http://schemas.openxmlformats.org/drawingml/2006/main" xmlns:p="http://schemas.openxmlformats.org/presentationml/2006/main" xmlns:r="http://schemas.openxmlformats.org/officeDocument/2006/relationships">
-  <p:cSld>
-    <p:spTree>
-      <p:nvGrpSpPr>
-        <p:cNvPr id="1" name=""/>
-        <p:cNvGrpSpPr/>
-        <p:nvPr/>
-      </p:nvGrpSpPr>
-      <p:grpSpPr>
-        <a:xfrm>
-          <a:off x="0" y="0"/>
-          <a:ext cx="0" cy="0"/>
-          <a:chOff x="0" y="0"/>
-          <a:chExt cx="0" cy="0"/>
-        </a:xfrm>
-      </p:grpSpPr>
-      <p:sp>
-        <p:nvSpPr>
-          <p:cNvPr id="2" name="Slide Image Placeholder 1"/>
-          <p:cNvSpPr>
-            <a:spLocks noGrp="1"/>
-          </p:cNvSpPr>
-          <p:nvPr>
-            <p:ph type="sldImg" idx="2"/>
-          </p:nvPr>
-        </p:nvSpPr>
-        <p:spPr/>
-      </p:sp>
-      <p:sp>
-        <p:nvSpPr>
-          <p:cNvPr id="3" name="Notes Placeholder 2"/>
-          <p:cNvSpPr>
-            <a:spLocks noGrp="1"/>
-          </p:cNvSpPr>
-          <p:nvPr>
-            <p:ph type="body" idx="3" sz="quarter"/>
-          </p:nvPr>
-        </p:nvSpPr>
-        <p:spPr/>
-        <p:txBody>
-          <a:bodyPr/>
-          <a:lstStyle/>
-          <a:p/>
-        </p:txBody>
-      </p:sp>
-      <p:sp>
-        <p:nvSpPr>
-          <p:cNvPr id="4" name="Slide Number Placeholder 3"/>
-          <p:cNvSpPr>
-            <a:spLocks noGrp="1"/>
-          </p:cNvSpPr>
-          <p:nvPr>
-            <p:ph type="sldNum" idx="5" sz="quarter"/>
-          </p:nvPr>
-        </p:nvSpPr>
-        <p:spPr/>
-      </p:sp>
-    </p:spTree>
-  </p:cSld>
-  <p:clrMapOvr>
-    <a:masterClrMapping/>
-  </p:clrMapOvr>
-</p:notes>
-</file>
-
-<file path=ppt/notesSlides/notesSlide18.xml><?xml version="1.0" encoding="utf-8"?>
 <p:notes xmlns:a="http://schemas.openxmlformats.org/drawingml/2006/main" xmlns:p="http://schemas.openxmlformats.org/presentationml/2006/main" xmlns:r="http://schemas.openxmlformats.org/officeDocument/2006/relationships">
   <p:cSld>
     <p:spTree>
@@ -4803,7 +4736,7 @@
                 </a:solidFill>
                 <a:latin typeface="Droid Sans Fallback"/>
               </a:rPr>
-              <a:t>现在看所有事件：一个通道给出又宽又歪的分布</a:t>
+              <a:t>各通道求和：32 ± 1%</a:t>
             </a:r>
           </a:p>
           <a:p>
@@ -4814,7 +4747,7 @@
                 </a:solidFill>
                 <a:latin typeface="Droid Sans Fallback"/>
               </a:rPr>
-              <a:t>PBS1，1917 个 K 线事件，每个事件一次拟合、一次积分</a:t>
+              <a:t>每个 K 线事件被 TES 吸收的总能量</a:t>
             </a:r>
           </a:p>
         </p:txBody>
@@ -4898,7 +4831,7 @@
       </p:sp>
       <p:pic>
         <p:nvPicPr>
-          <p:cNvPr id="5" name="Picture 4" descr="hist_PBS1.png"/>
+          <p:cNvPr id="5" name="Picture 4" descr="hist_sum.png"/>
           <p:cNvPicPr>
             <a:picLocks noChangeAspect="1"/>
           </p:cNvPicPr>
@@ -4948,13 +4881,13 @@
               </a:spcAft>
             </a:pPr>
             <a:r>
-              <a:rPr sz="1500" b="0" i="0">
-                <a:solidFill>
-                  <a:srgbClr val="333333"/>
+              <a:rPr sz="1500" b="1" i="0">
+                <a:solidFill>
+                  <a:srgbClr val="C0392B"/>
                 </a:solidFill>
                 <a:latin typeface="Droid Sans Fallback"/>
               </a:rPr>
-              <a:t>红色：来自拟合。灰色：官方窗口在原始波形上算的。峰位只差 0.2%。</a:t>
+              <a:t>10 个通道求和，1827 个事件：3162 eV = 30.5%，宽度降到 7.5% —— 位置效应抵消了。</a:t>
             </a:r>
           </a:p>
           <a:p>
@@ -4964,13 +4897,13 @@
               </a:spcAft>
             </a:pPr>
             <a:r>
-              <a:rPr sz="1500" b="1" i="0">
-                <a:solidFill>
-                  <a:srgbClr val="C0392B"/>
+              <a:rPr sz="1500" b="0" i="0">
+                <a:solidFill>
+                  <a:srgbClr val="333333"/>
                 </a:solidFill>
                 <a:latin typeface="Droid Sans Fallback"/>
               </a:rPr>
-              <a:t>峰 285 eV，宽度 15% —— 这可是一条能量固定的谱线。</a:t>
+              <a:t>PDS2 只有 42% 的事件能拟合上（那个缓慢起伏），而且这些事件不典型；它的份额只能给一个范围。</a:t>
             </a:r>
           </a:p>
           <a:p>
@@ -4980,13 +4913,13 @@
               </a:spcAft>
             </a:pPr>
             <a:r>
-              <a:rPr sz="1500" b="0" i="0">
-                <a:solidFill>
-                  <a:srgbClr val="333333"/>
+              <a:rPr sz="1500" b="1" i="0">
+                <a:solidFill>
+                  <a:srgbClr val="C0392B"/>
                 </a:solidFill>
                 <a:latin typeface="Droid Sans Fallback"/>
               </a:rPr>
-              <a:t>往右拖的尾巴，是发生在这个通道附近的事件。</a:t>
+              <a:t>完整效率 31.5–32.9%：  32 ± 1%。</a:t>
             </a:r>
           </a:p>
           <a:p>
@@ -4996,13 +4929,13 @@
               </a:spcAft>
             </a:pPr>
             <a:r>
-              <a:rPr sz="1500" b="1" i="0">
-                <a:solidFill>
-                  <a:srgbClr val="C0392B"/>
+              <a:rPr sz="1500" b="0" i="0">
+                <a:solidFill>
+                  <a:srgbClr val="333333"/>
                 </a:solidFill>
                 <a:latin typeface="Droid Sans Fallback"/>
               </a:rPr>
-              <a:t>单通道的宽度是事件位置，不是噪声。</a:t>
+              <a:t>红线：10.37 keV —— 三分之二的能量根本没到 TES。</a:t>
             </a:r>
           </a:p>
         </p:txBody>
@@ -5054,18 +4987,7 @@
                 </a:solidFill>
                 <a:latin typeface="Droid Sans Fallback"/>
               </a:rPr>
-              <a:t>各通道求和：32 ± 1%</a:t>
-            </a:r>
-          </a:p>
-          <a:p>
-            <a:r>
-              <a:rPr sz="1400" b="0" i="0">
-                <a:solidFill>
-                  <a:srgbClr val="666666"/>
-                </a:solidFill>
-                <a:latin typeface="Droid Sans Fallback"/>
-              </a:rPr>
-              <a:t>每个 K 线事件被 TES 吸收的总能量</a:t>
+              <a:t>总结，以及还没落实的</a:t>
             </a:r>
           </a:p>
         </p:txBody>
@@ -5147,40 +5069,16 @@
           </a:p>
         </p:txBody>
       </p:sp>
-      <p:pic>
-        <p:nvPicPr>
-          <p:cNvPr id="5" name="Picture 4" descr="hist_sum.png"/>
-          <p:cNvPicPr>
-            <a:picLocks noChangeAspect="1"/>
-          </p:cNvPicPr>
-          <p:nvPr/>
-        </p:nvPicPr>
-        <p:blipFill>
-          <a:blip r:embed="rId3"/>
-          <a:stretch>
-            <a:fillRect/>
-          </a:stretch>
-        </p:blipFill>
-        <p:spPr>
-          <a:xfrm>
-            <a:off x="502920" y="1412748"/>
-            <a:ext cx="7863840" cy="4718304"/>
-          </a:xfrm>
-          <a:prstGeom prst="rect">
-            <a:avLst/>
-          </a:prstGeom>
-        </p:spPr>
-      </p:pic>
-      <p:sp>
-        <p:nvSpPr>
-          <p:cNvPr id="6" name="TextBox 5"/>
+      <p:sp>
+        <p:nvSpPr>
+          <p:cNvPr id="5" name="TextBox 4"/>
           <p:cNvSpPr txBox="1"/>
           <p:nvPr/>
         </p:nvSpPr>
         <p:spPr>
           <a:xfrm>
-            <a:off x="8549640" y="1463040"/>
-            <a:ext cx="3291840" cy="4572000"/>
+            <a:off x="502920" y="1325880"/>
+            <a:ext cx="11247120" cy="5029200"/>
           </a:xfrm>
           <a:prstGeom prst="rect">
             <a:avLst/>
@@ -5199,13 +5097,13 @@
               </a:spcAft>
             </a:pPr>
             <a:r>
-              <a:rPr sz="1500" b="1" i="0">
-                <a:solidFill>
-                  <a:srgbClr val="C0392B"/>
+              <a:rPr sz="1700" b="0" i="0">
+                <a:solidFill>
+                  <a:srgbClr val="333333"/>
                 </a:solidFill>
                 <a:latin typeface="Droid Sans Fallback"/>
               </a:rPr>
-              <a:t>10 个通道求和，1827 个事件：3162 eV = 30.5%，宽度降到 7.5% —— 位置效应抵消了。</a:t>
+              <a:t>电流脉冲通过 TES 方程变成功率脉冲；功率下面的面积就是能量。二次项只有 2%。</a:t>
             </a:r>
           </a:p>
           <a:p>
@@ -5215,13 +5113,13 @@
               </a:spcAft>
             </a:pPr>
             <a:r>
-              <a:rPr sz="1500" b="0" i="0">
+              <a:rPr sz="1700" b="0" i="0">
                 <a:solidFill>
                   <a:srgbClr val="333333"/>
                 </a:solidFill>
                 <a:latin typeface="Droid Sans Fallback"/>
               </a:rPr>
-              <a:t>PDS2 只有 42% 的事件能拟合上（那个缓慢起伏），而且这些事件不典型；它的份额只能给一个范围。</a:t>
+              <a:t>能量来自拟合脉冲、从 −∞ 积到 +∞：没有最大值的噪声偏差，没有漂移。</a:t>
             </a:r>
           </a:p>
           <a:p>
@@ -5231,13 +5129,13 @@
               </a:spcAft>
             </a:pPr>
             <a:r>
-              <a:rPr sz="1500" b="1" i="0">
-                <a:solidFill>
-                  <a:srgbClr val="C0392B"/>
+              <a:rPr sz="1700" b="0" i="0">
+                <a:solidFill>
+                  <a:srgbClr val="333333"/>
                 </a:solidFill>
                 <a:latin typeface="Droid Sans Fallback"/>
               </a:rPr>
-              <a:t>完整效率 31.5–32.9%：  32 ± 1%。</a:t>
+              <a:t>单通道：15% 宽、歪的（位置效应）。10 个通道求和：7.5%、对称。</a:t>
             </a:r>
           </a:p>
           <a:p>
@@ -5247,13 +5145,29 @@
               </a:spcAft>
             </a:pPr>
             <a:r>
-              <a:rPr sz="1500" b="0" i="0">
-                <a:solidFill>
-                  <a:srgbClr val="333333"/>
+              <a:rPr sz="1700" b="1" i="0">
+                <a:solidFill>
+                  <a:srgbClr val="C0392B"/>
                 </a:solidFill>
                 <a:latin typeface="Droid Sans Fallback"/>
               </a:rPr>
-              <a:t>红线：10.37 keV —— 三分之二的能量根本没到 TES。</a:t>
+              <a:t>Z7 把一个 10.37 keV 事件的 32 ± 1% 吸收进 TES。CDMS 文档在 R37 CUTE tower 上报的是 26–41%。</a:t>
+            </a:r>
+          </a:p>
+          <a:p>
+            <a:pPr>
+              <a:spcAft>
+                <a:spcPts val="800"/>
+              </a:spcAft>
+            </a:pPr>
+            <a:r>
+              <a:rPr sz="1700" b="0" i="0">
+                <a:solidFill>
+                  <a:srgbClr val="333333"/>
+                </a:solidFill>
+                <a:latin typeface="Droid Sans Fallback"/>
+              </a:rPr>
+              <a:t>还没落实：只做了 Z7 · Z7 的 HV 偏压没有确认（按 0 V 算） · 没有 dI/dV，电感项被丢掉 · PDS2 就是那 ±1% · 12.5% 的事件在任何通道都拟合不上，没进直方图。</a:t>
             </a:r>
           </a:p>
         </p:txBody>
@@ -5305,7 +5219,7 @@
                 </a:solidFill>
                 <a:latin typeface="Droid Sans Fallback"/>
               </a:rPr>
-              <a:t>总结，以及还没落实的</a:t>
+              <a:t>Backup — 事件谱</a:t>
             </a:r>
           </a:p>
         </p:txBody>
@@ -5387,109 +5301,30 @@
           </a:p>
         </p:txBody>
       </p:sp>
-      <p:sp>
-        <p:nvSpPr>
-          <p:cNvPr id="5" name="TextBox 4"/>
-          <p:cNvSpPr txBox="1"/>
+      <p:pic>
+        <p:nvPicPr>
+          <p:cNvPr id="5" name="Picture 4" descr="spectrum_zip7.png"/>
+          <p:cNvPicPr>
+            <a:picLocks noChangeAspect="1"/>
+          </p:cNvPicPr>
           <p:nvPr/>
-        </p:nvSpPr>
-        <p:spPr>
-          <a:xfrm>
-            <a:off x="502920" y="1325880"/>
-            <a:ext cx="11247120" cy="5029200"/>
-          </a:xfrm>
-          <a:prstGeom prst="rect">
-            <a:avLst/>
-          </a:prstGeom>
-          <a:noFill/>
-        </p:spPr>
-        <p:txBody>
-          <a:bodyPr wrap="square">
-            <a:spAutoFit/>
-          </a:bodyPr>
-          <a:lstStyle/>
-          <a:p>
-            <a:pPr>
-              <a:spcAft>
-                <a:spcPts val="800"/>
-              </a:spcAft>
-            </a:pPr>
-            <a:r>
-              <a:rPr sz="1700" b="0" i="0">
-                <a:solidFill>
-                  <a:srgbClr val="333333"/>
-                </a:solidFill>
-                <a:latin typeface="Droid Sans Fallback"/>
-              </a:rPr>
-              <a:t>电流脉冲通过 TES 方程变成功率脉冲；功率下面的面积就是能量。二次项只有 2%。</a:t>
-            </a:r>
-          </a:p>
-          <a:p>
-            <a:pPr>
-              <a:spcAft>
-                <a:spcPts val="800"/>
-              </a:spcAft>
-            </a:pPr>
-            <a:r>
-              <a:rPr sz="1700" b="0" i="0">
-                <a:solidFill>
-                  <a:srgbClr val="333333"/>
-                </a:solidFill>
-                <a:latin typeface="Droid Sans Fallback"/>
-              </a:rPr>
-              <a:t>能量来自拟合脉冲、从 −∞ 积到 +∞：没有最大值的噪声偏差，没有漂移。</a:t>
-            </a:r>
-          </a:p>
-          <a:p>
-            <a:pPr>
-              <a:spcAft>
-                <a:spcPts val="800"/>
-              </a:spcAft>
-            </a:pPr>
-            <a:r>
-              <a:rPr sz="1700" b="0" i="0">
-                <a:solidFill>
-                  <a:srgbClr val="333333"/>
-                </a:solidFill>
-                <a:latin typeface="Droid Sans Fallback"/>
-              </a:rPr>
-              <a:t>单通道：15% 宽、歪的（位置效应）。10 个通道求和：7.5%、对称。</a:t>
-            </a:r>
-          </a:p>
-          <a:p>
-            <a:pPr>
-              <a:spcAft>
-                <a:spcPts val="800"/>
-              </a:spcAft>
-            </a:pPr>
-            <a:r>
-              <a:rPr sz="1700" b="1" i="0">
-                <a:solidFill>
-                  <a:srgbClr val="C0392B"/>
-                </a:solidFill>
-                <a:latin typeface="Droid Sans Fallback"/>
-              </a:rPr>
-              <a:t>Z7 把一个 10.37 keV 事件的 32 ± 1% 吸收进 TES。CDMS 文档在 R37 CUTE tower 上报的是 26–41%。</a:t>
-            </a:r>
-          </a:p>
-          <a:p>
-            <a:pPr>
-              <a:spcAft>
-                <a:spcPts val="800"/>
-              </a:spcAft>
-            </a:pPr>
-            <a:r>
-              <a:rPr sz="1700" b="0" i="0">
-                <a:solidFill>
-                  <a:srgbClr val="333333"/>
-                </a:solidFill>
-                <a:latin typeface="Droid Sans Fallback"/>
-              </a:rPr>
-              <a:t>还没落实：只做了 Z7 · Z7 的 HV 偏压没有确认（按 0 V 算） · 没有 dI/dV，电感项被丢掉 · PDS2 就是那 ±1% · 12.5% 的事件在任何通道都拟合不上，没进直方图。</a:t>
-            </a:r>
-          </a:p>
-        </p:txBody>
-      </p:sp>
+        </p:nvPicPr>
+        <p:blipFill>
+          <a:blip r:embed="rId3"/>
+          <a:stretch>
+            <a:fillRect/>
+          </a:stretch>
+        </p:blipFill>
+        <p:spPr>
+          <a:xfrm>
+            <a:off x="991910" y="1143000"/>
+            <a:ext cx="10269140" cy="5257800"/>
+          </a:xfrm>
+          <a:prstGeom prst="rect">
+            <a:avLst/>
+          </a:prstGeom>
+        </p:spPr>
+      </p:pic>
     </p:spTree>
   </p:cSld>
   <p:clrMapOvr>
@@ -5537,7 +5372,7 @@
                 </a:solidFill>
                 <a:latin typeface="Droid Sans Fallback"/>
               </a:rPr>
-              <a:t>Backup — 事件谱</a:t>
+              <a:t>Backup — 功率公式的三个版本</a:t>
             </a:r>
           </a:p>
         </p:txBody>
@@ -5619,30 +5454,93 @@
           </a:p>
         </p:txBody>
       </p:sp>
-      <p:pic>
-        <p:nvPicPr>
-          <p:cNvPr id="5" name="Picture 4" descr="spectrum_zip7.png"/>
-          <p:cNvPicPr>
-            <a:picLocks noChangeAspect="1"/>
-          </p:cNvPicPr>
+      <p:sp>
+        <p:nvSpPr>
+          <p:cNvPr id="5" name="TextBox 4"/>
+          <p:cNvSpPr txBox="1"/>
           <p:nvPr/>
-        </p:nvPicPr>
-        <p:blipFill>
-          <a:blip r:embed="rId3"/>
-          <a:stretch>
-            <a:fillRect/>
-          </a:stretch>
-        </p:blipFill>
-        <p:spPr>
-          <a:xfrm>
-            <a:off x="991910" y="1143000"/>
-            <a:ext cx="10269140" cy="5257800"/>
-          </a:xfrm>
-          <a:prstGeom prst="rect">
-            <a:avLst/>
-          </a:prstGeom>
-        </p:spPr>
-      </p:pic>
+        </p:nvSpPr>
+        <p:spPr>
+          <a:xfrm>
+            <a:off x="502920" y="1325880"/>
+            <a:ext cx="11247120" cy="5029200"/>
+          </a:xfrm>
+          <a:prstGeom prst="rect">
+            <a:avLst/>
+          </a:prstGeom>
+          <a:noFill/>
+        </p:spPr>
+        <p:txBody>
+          <a:bodyPr wrap="square">
+            <a:spAutoFit/>
+          </a:bodyPr>
+          <a:lstStyle/>
+          <a:p>
+            <a:pPr>
+              <a:spcAft>
+                <a:spcPts val="800"/>
+              </a:spcAft>
+            </a:pPr>
+            <a:r>
+              <a:rPr sz="1700" b="0" i="0">
+                <a:solidFill>
+                  <a:srgbClr val="333333"/>
+                </a:solidFill>
+                <a:latin typeface="Droid Sans Fallback"/>
+              </a:rPr>
+              <a:t>δP = I₀(R_L − R₀)·δI + c₂·R_L·(δI)²     c₂ = 2（method 1，本报告用的）、1（精确的小信号解）、−1（method 2）</a:t>
+            </a:r>
+          </a:p>
+          <a:p>
+            <a:pPr>
+              <a:spcAft>
+                <a:spcPts val="800"/>
+              </a:spcAft>
+            </a:pPr>
+            <a:r>
+              <a:rPr sz="1700" b="0" i="0">
+                <a:solidFill>
+                  <a:srgbClr val="333333"/>
+                </a:solidFill>
+                <a:latin typeface="Droid Sans Fallback"/>
+              </a:rPr>
+              <a:t>相对精确解：method 1 高 0.58%，method 2 低 1.15% —— 远小于单通道 15% 的宽度和 PDS2 的范围。</a:t>
+            </a:r>
+          </a:p>
+          <a:p>
+            <a:pPr>
+              <a:spcAft>
+                <a:spcPts val="800"/>
+              </a:spcAft>
+            </a:pPr>
+            <a:r>
+              <a:rPr sz="1700" b="0" i="0">
+                <a:solidFill>
+                  <a:srgbClr val="333333"/>
+                </a:solidFill>
+                <a:latin typeface="Droid Sans Fallback"/>
+              </a:rPr>
+              <a:t>完整方程里的电感项需要 L 和 loop gain，要从 dI/dV 来，MSI 上这些 series 没有这个数据；这一项被忽略。</a:t>
+            </a:r>
+          </a:p>
+          <a:p>
+            <a:pPr>
+              <a:spcAft>
+                <a:spcPts val="800"/>
+              </a:spcAft>
+            </a:pPr>
+            <a:r>
+              <a:rPr sz="1700" b="0" i="0">
+                <a:solidFill>
+                  <a:srgbClr val="333333"/>
+                </a:solidFill>
+                <a:latin typeface="Droid Sans Fallback"/>
+              </a:rPr>
+              <a:t>官方 Eabs（触发在第 16383 点，基线是 93..15758 点的平均，5 阶 20 kHz 预滤波，窗口 −0.5/+1 ms，同一个公式）复现到 0.2%；直方图页上的灰色轮廓就是它。</a:t>
+            </a:r>
+          </a:p>
+        </p:txBody>
+      </p:sp>
     </p:spTree>
   </p:cSld>
   <p:clrMapOvr>
@@ -5690,7 +5588,7 @@
                 </a:solidFill>
                 <a:latin typeface="Droid Sans Fallback"/>
               </a:rPr>
-              <a:t>Backup — 功率公式的三个版本</a:t>
+              <a:t>Backup — 15 个事件，拟合电流和功率（PBS1）</a:t>
             </a:r>
           </a:p>
         </p:txBody>
@@ -5772,93 +5670,30 @@
           </a:p>
         </p:txBody>
       </p:sp>
-      <p:sp>
-        <p:nvSpPr>
-          <p:cNvPr id="5" name="TextBox 4"/>
-          <p:cNvSpPr txBox="1"/>
+      <p:pic>
+        <p:nvPicPr>
+          <p:cNvPr id="5" name="Picture 4" descr="pulse_15events.png"/>
+          <p:cNvPicPr>
+            <a:picLocks noChangeAspect="1"/>
+          </p:cNvPicPr>
           <p:nvPr/>
-        </p:nvSpPr>
-        <p:spPr>
-          <a:xfrm>
-            <a:off x="502920" y="1325880"/>
-            <a:ext cx="11247120" cy="5029200"/>
-          </a:xfrm>
-          <a:prstGeom prst="rect">
-            <a:avLst/>
-          </a:prstGeom>
-          <a:noFill/>
-        </p:spPr>
-        <p:txBody>
-          <a:bodyPr wrap="square">
-            <a:spAutoFit/>
-          </a:bodyPr>
-          <a:lstStyle/>
-          <a:p>
-            <a:pPr>
-              <a:spcAft>
-                <a:spcPts val="800"/>
-              </a:spcAft>
-            </a:pPr>
-            <a:r>
-              <a:rPr sz="1700" b="0" i="0">
-                <a:solidFill>
-                  <a:srgbClr val="333333"/>
-                </a:solidFill>
-                <a:latin typeface="Droid Sans Fallback"/>
-              </a:rPr>
-              <a:t>δP = I₀(R_L − R₀)·δI + c₂·R_L·(δI)²     c₂ = 2（method 1，本报告用的）、1（精确的小信号解）、−1（method 2）</a:t>
-            </a:r>
-          </a:p>
-          <a:p>
-            <a:pPr>
-              <a:spcAft>
-                <a:spcPts val="800"/>
-              </a:spcAft>
-            </a:pPr>
-            <a:r>
-              <a:rPr sz="1700" b="0" i="0">
-                <a:solidFill>
-                  <a:srgbClr val="333333"/>
-                </a:solidFill>
-                <a:latin typeface="Droid Sans Fallback"/>
-              </a:rPr>
-              <a:t>相对精确解：method 1 高 0.58%，method 2 低 1.15% —— 远小于单通道 15% 的宽度和 PDS2 的范围。</a:t>
-            </a:r>
-          </a:p>
-          <a:p>
-            <a:pPr>
-              <a:spcAft>
-                <a:spcPts val="800"/>
-              </a:spcAft>
-            </a:pPr>
-            <a:r>
-              <a:rPr sz="1700" b="0" i="0">
-                <a:solidFill>
-                  <a:srgbClr val="333333"/>
-                </a:solidFill>
-                <a:latin typeface="Droid Sans Fallback"/>
-              </a:rPr>
-              <a:t>完整方程里的电感项需要 L 和 loop gain，要从 dI/dV 来，MSI 上这些 series 没有这个数据；这一项被忽略。</a:t>
-            </a:r>
-          </a:p>
-          <a:p>
-            <a:pPr>
-              <a:spcAft>
-                <a:spcPts val="800"/>
-              </a:spcAft>
-            </a:pPr>
-            <a:r>
-              <a:rPr sz="1700" b="0" i="0">
-                <a:solidFill>
-                  <a:srgbClr val="333333"/>
-                </a:solidFill>
-                <a:latin typeface="Droid Sans Fallback"/>
-              </a:rPr>
-              <a:t>官方 Eabs（触发在第 16383 点，基线是 93..15758 点的平均，5 阶 20 kHz 预滤波，窗口 −0.5/+1 ms，同一个公式）复现到 0.2%；直方图页上的灰色轮廓就是它。</a:t>
-            </a:r>
-          </a:p>
-        </p:txBody>
-      </p:sp>
+        </p:nvPicPr>
+        <p:blipFill>
+          <a:blip r:embed="rId3"/>
+          <a:stretch>
+            <a:fillRect/>
+          </a:stretch>
+        </p:blipFill>
+        <p:spPr>
+          <a:xfrm>
+            <a:off x="2671354" y="1143000"/>
+            <a:ext cx="6910251" cy="5257800"/>
+          </a:xfrm>
+          <a:prstGeom prst="rect">
+            <a:avLst/>
+          </a:prstGeom>
+        </p:spPr>
+      </p:pic>
     </p:spTree>
   </p:cSld>
   <p:clrMapOvr>
@@ -5906,7 +5741,7 @@
                 </a:solidFill>
                 <a:latin typeface="Droid Sans Fallback"/>
               </a:rPr>
-              <a:t>Backup — 15 个事件，拟合电流和功率（PBS1）</a:t>
+              <a:t>Backup — 15 个事件，累计能量（PBS1）</a:t>
             </a:r>
           </a:p>
         </p:txBody>
@@ -5990,7 +5825,7 @@
       </p:sp>
       <p:pic>
         <p:nvPicPr>
-          <p:cNvPr id="5" name="Picture 4" descr="pulse_15events.png"/>
+          <p:cNvPr id="5" name="Picture 4" descr="cum_15events.png"/>
           <p:cNvPicPr>
             <a:picLocks noChangeAspect="1"/>
           </p:cNvPicPr>
@@ -6059,7 +5894,7 @@
                 </a:solidFill>
                 <a:latin typeface="Droid Sans Fallback"/>
               </a:rPr>
-              <a:t>Backup — 15 个事件，累计能量（PBS1）</a:t>
+              <a:t>Backup — 事件 30646，全部通道</a:t>
             </a:r>
           </a:p>
         </p:txBody>
@@ -6143,7 +5978,7 @@
       </p:sp>
       <p:pic>
         <p:nvPicPr>
-          <p:cNvPr id="5" name="Picture 4" descr="cum_15events.png"/>
+          <p:cNvPr id="5" name="Picture 4" descr="allchan_pulses.png"/>
           <p:cNvPicPr>
             <a:picLocks noChangeAspect="1"/>
           </p:cNvPicPr>
@@ -6157,8 +5992,8 @@
         </p:blipFill>
         <p:spPr>
           <a:xfrm>
-            <a:off x="2671354" y="1143000"/>
-            <a:ext cx="6910251" cy="5257800"/>
+            <a:off x="502920" y="1758921"/>
+            <a:ext cx="11247120" cy="4025957"/>
           </a:xfrm>
           <a:prstGeom prst="rect">
             <a:avLst/>
@@ -6212,7 +6047,7 @@
                 </a:solidFill>
                 <a:latin typeface="Droid Sans Fallback"/>
               </a:rPr>
-              <a:t>Backup — 事件 30646，全部通道</a:t>
+              <a:t>Backup — 每个通道的能量分布</a:t>
             </a:r>
           </a:p>
         </p:txBody>
@@ -6290,159 +6125,6 @@
                 <a:latin typeface="Droid Sans Fallback"/>
               </a:rPr>
               <a:t>17</a:t>
-            </a:r>
-          </a:p>
-        </p:txBody>
-      </p:sp>
-      <p:pic>
-        <p:nvPicPr>
-          <p:cNvPr id="5" name="Picture 4" descr="allchan_pulses.png"/>
-          <p:cNvPicPr>
-            <a:picLocks noChangeAspect="1"/>
-          </p:cNvPicPr>
-          <p:nvPr/>
-        </p:nvPicPr>
-        <p:blipFill>
-          <a:blip r:embed="rId3"/>
-          <a:stretch>
-            <a:fillRect/>
-          </a:stretch>
-        </p:blipFill>
-        <p:spPr>
-          <a:xfrm>
-            <a:off x="502920" y="1758921"/>
-            <a:ext cx="11247120" cy="4025957"/>
-          </a:xfrm>
-          <a:prstGeom prst="rect">
-            <a:avLst/>
-          </a:prstGeom>
-        </p:spPr>
-      </p:pic>
-    </p:spTree>
-  </p:cSld>
-  <p:clrMapOvr>
-    <a:masterClrMapping/>
-  </p:clrMapOvr>
-</p:sld>
-</file>
-
-<file path=ppt/slides/slide18.xml><?xml version="1.0" encoding="utf-8"?>
-<p:sld xmlns:a="http://schemas.openxmlformats.org/drawingml/2006/main" xmlns:p="http://schemas.openxmlformats.org/presentationml/2006/main" xmlns:r="http://schemas.openxmlformats.org/officeDocument/2006/relationships">
-  <p:cSld>
-    <p:spTree>
-      <p:nvGrpSpPr>
-        <p:cNvPr id="1" name=""/>
-        <p:cNvGrpSpPr/>
-        <p:nvPr/>
-      </p:nvGrpSpPr>
-      <p:grpSpPr/>
-      <p:sp>
-        <p:nvSpPr>
-          <p:cNvPr id="2" name="TextBox 1"/>
-          <p:cNvSpPr txBox="1"/>
-          <p:nvPr/>
-        </p:nvSpPr>
-        <p:spPr>
-          <a:xfrm>
-            <a:off x="502920" y="228600"/>
-            <a:ext cx="11247120" cy="731520"/>
-          </a:xfrm>
-          <a:prstGeom prst="rect">
-            <a:avLst/>
-          </a:prstGeom>
-          <a:noFill/>
-        </p:spPr>
-        <p:txBody>
-          <a:bodyPr wrap="square">
-            <a:spAutoFit/>
-          </a:bodyPr>
-          <a:lstStyle/>
-          <a:p>
-            <a:r>
-              <a:rPr sz="2700" b="1" i="0">
-                <a:solidFill>
-                  <a:srgbClr val="1F3864"/>
-                </a:solidFill>
-                <a:latin typeface="Droid Sans Fallback"/>
-              </a:rPr>
-              <a:t>Backup — 每个通道的能量分布</a:t>
-            </a:r>
-          </a:p>
-        </p:txBody>
-      </p:sp>
-      <p:sp>
-        <p:nvSpPr>
-          <p:cNvPr id="3" name="Rectangle 2"/>
-          <p:cNvSpPr/>
-          <p:nvPr/>
-        </p:nvSpPr>
-        <p:spPr>
-          <a:xfrm>
-            <a:off x="502920" y="969264"/>
-            <a:ext cx="11247120" cy="18000"/>
-          </a:xfrm>
-          <a:prstGeom prst="rect">
-            <a:avLst/>
-          </a:prstGeom>
-          <a:solidFill>
-            <a:srgbClr val="1F3864"/>
-          </a:solidFill>
-          <a:ln>
-            <a:noFill/>
-          </a:ln>
-        </p:spPr>
-        <p:style>
-          <a:lnRef idx="1">
-            <a:schemeClr val="accent1"/>
-          </a:lnRef>
-          <a:fillRef idx="3">
-            <a:schemeClr val="accent1"/>
-          </a:fillRef>
-          <a:effectRef idx="2">
-            <a:schemeClr val="accent1"/>
-          </a:effectRef>
-          <a:fontRef idx="minor">
-            <a:schemeClr val="lt1"/>
-          </a:fontRef>
-        </p:style>
-        <p:txBody>
-          <a:bodyPr rtlCol="0" anchor="ctr"/>
-          <a:lstStyle/>
-          <a:p>
-            <a:pPr algn="ctr"/>
-          </a:p>
-        </p:txBody>
-      </p:sp>
-      <p:sp>
-        <p:nvSpPr>
-          <p:cNvPr id="4" name="TextBox 3"/>
-          <p:cNvSpPr txBox="1"/>
-          <p:nvPr/>
-        </p:nvSpPr>
-        <p:spPr>
-          <a:xfrm>
-            <a:off x="11430000" y="6446520"/>
-            <a:ext cx="548640" cy="320040"/>
-          </a:xfrm>
-          <a:prstGeom prst="rect">
-            <a:avLst/>
-          </a:prstGeom>
-          <a:noFill/>
-        </p:spPr>
-        <p:txBody>
-          <a:bodyPr wrap="square">
-            <a:spAutoFit/>
-          </a:bodyPr>
-          <a:lstStyle/>
-          <a:p>
-            <a:r>
-              <a:rPr sz="1000" b="0" i="0">
-                <a:solidFill>
-                  <a:srgbClr val="666666"/>
-                </a:solidFill>
-                <a:latin typeface="Droid Sans Fallback"/>
-              </a:rPr>
-              <a:t>18</a:t>
             </a:r>
           </a:p>
         </p:txBody>
@@ -6742,7 +6424,7 @@
                 </a:solidFill>
                 <a:latin typeface="Droid Sans Fallback"/>
               </a:rPr>
-              <a:t>公式是怎么来的</a:t>
+              <a:t>公式和它需要的两个数</a:t>
             </a:r>
           </a:p>
           <a:p>
@@ -6753,7 +6435,7 @@
                 </a:solidFill>
                 <a:latin typeface="Droid Sans Fallback"/>
               </a:rPr>
-              <a:t>薄膜吸收的能量，是从它自己的焦耳热里“扣掉”的</a:t>
+              <a:t>采用 CDMS 收集效率文档里的 Method 1</a:t>
             </a:r>
           </a:p>
         </p:txBody>
@@ -6837,7 +6519,7 @@
       </p:sp>
       <p:pic>
         <p:nvPicPr>
-          <p:cNvPr id="5" name="Picture 4" descr="circuit.png"/>
+          <p:cNvPr id="5" name="Picture 4" descr="formula.png"/>
           <p:cNvPicPr>
             <a:picLocks noChangeAspect="1"/>
           </p:cNvPicPr>
@@ -6851,48 +6533,24 @@
         </p:blipFill>
         <p:spPr>
           <a:xfrm>
-            <a:off x="502920" y="1595301"/>
-            <a:ext cx="4434840" cy="3484517"/>
+            <a:off x="997889" y="1143000"/>
+            <a:ext cx="10257182" cy="3931920"/>
           </a:xfrm>
           <a:prstGeom prst="rect">
             <a:avLst/>
           </a:prstGeom>
         </p:spPr>
       </p:pic>
-      <p:pic>
-        <p:nvPicPr>
-          <p:cNvPr id="6" name="Picture 5" descr="derivation.png"/>
-          <p:cNvPicPr>
-            <a:picLocks noChangeAspect="1"/>
-          </p:cNvPicPr>
-          <p:nvPr/>
-        </p:nvPicPr>
-        <p:blipFill>
-          <a:blip r:embed="rId4"/>
-          <a:stretch>
-            <a:fillRect/>
-          </a:stretch>
-        </p:blipFill>
-        <p:spPr>
-          <a:xfrm>
-            <a:off x="5120640" y="1179151"/>
-            <a:ext cx="6629400" cy="4316818"/>
-          </a:xfrm>
-          <a:prstGeom prst="rect">
-            <a:avLst/>
-          </a:prstGeom>
-        </p:spPr>
-      </p:pic>
-      <p:sp>
-        <p:nvSpPr>
-          <p:cNvPr id="7" name="TextBox 6"/>
+      <p:sp>
+        <p:nvSpPr>
+          <p:cNvPr id="6" name="TextBox 5"/>
           <p:cNvSpPr txBox="1"/>
           <p:nvPr/>
         </p:nvSpPr>
         <p:spPr>
           <a:xfrm>
-            <a:off x="502920" y="5669280"/>
-            <a:ext cx="11247120" cy="1097280"/>
+            <a:off x="502920" y="5120640"/>
+            <a:ext cx="11247120" cy="1463040"/>
           </a:xfrm>
           <a:prstGeom prst="rect">
             <a:avLst/>
@@ -6911,13 +6569,13 @@
               </a:spcAft>
             </a:pPr>
             <a:r>
-              <a:rPr sz="1300" b="0" i="0">
+              <a:rPr sz="1500" b="0" i="0">
                 <a:solidFill>
                   <a:srgbClr val="333333"/>
                 </a:solidFill>
                 <a:latin typeface="Droid Sans Fallback"/>
               </a:rPr>
-              <a:t>事件把薄膜加热，电阻升高，电流下降 —— 焦耳热正好少掉事件送进来的那一份（负电热反馈）。</a:t>
+              <a:t>δP = 电流变化 δI 之后焦耳热的变化量：一个线性项，加一个很小的二次项。</a:t>
             </a:r>
           </a:p>
           <a:p>
@@ -6927,29 +6585,13 @@
               </a:spcAft>
             </a:pPr>
             <a:r>
-              <a:rPr sz="1300" b="1" i="0">
-                <a:solidFill>
-                  <a:srgbClr val="C0392B"/>
+              <a:rPr sz="1500" b="0" i="0">
+                <a:solidFill>
+                  <a:srgbClr val="333333"/>
                 </a:solidFill>
                 <a:latin typeface="Droid Sans Fallback"/>
               </a:rPr>
-              <a:t>所以吸收的能量完全可以从电流读出来：E = −∫δP_J dt，也就是下一页那个公式。</a:t>
-            </a:r>
-          </a:p>
-          <a:p>
-            <a:pPr>
-              <a:spcAft>
-                <a:spcPts val="800"/>
-              </a:spcAft>
-            </a:pPr>
-            <a:r>
-              <a:rPr sz="1300" b="0" i="0">
-                <a:solidFill>
-                  <a:srgbClr val="333333"/>
-                </a:solidFill>
-                <a:latin typeface="Droid Sans Fallback"/>
-              </a:rPr>
-              <a:t>没有算进去的：热泄漏项和电感边界项。两者都需要 dI/dV 给出的 G 和 L，这些 series 没有这个数据。</a:t>
+              <a:t>文档里还有一个 Method 2。换成我们的符号约定是 δP = I₀(R_L − R₀)·δI − R_L·(δI)²：线性项相同，只有二次项不同，能量低 1.7%（PBS1，15 个事件的中位数）。</a:t>
             </a:r>
           </a:p>
         </p:txBody>
@@ -7001,7 +6643,27 @@
                 </a:solidFill>
                 <a:latin typeface="Droid Sans Fallback"/>
               </a:rPr>
-              <a:t>公式和它需要的两个数</a:t>
+              <a:t>例子：一个脉冲</a:t>
+            </a:r>
+          </a:p>
+          <a:p>
+            <a:r>
+              <a:rPr sz="1400" b="0" i="0">
+                <a:solidFill>
+                  <a:srgbClr val="666666"/>
+                </a:solidFill>
+                <a:latin typeface="Droid Sans Fallback"/>
+              </a:rPr>
+              <a:t>Z7 PBS1，事件 30646：  </a:t>
+            </a:r>
+            <a:r>
+              <a:rPr sz="1400" b="1" i="0">
+                <a:solidFill>
+                  <a:srgbClr val="333333"/>
+                </a:solidFill>
+                <a:latin typeface="Droid Sans Fallback"/>
+              </a:rPr>
+              <a:t>同一条波形，读成 ADC 计数、读成电流、读成功率</a:t>
             </a:r>
           </a:p>
         </p:txBody>
@@ -7085,7 +6747,7 @@
       </p:sp>
       <p:pic>
         <p:nvPicPr>
-          <p:cNvPr id="5" name="Picture 4" descr="formula.png"/>
+          <p:cNvPr id="5" name="Picture 4" descr="peak_full.png"/>
           <p:cNvPicPr>
             <a:picLocks noChangeAspect="1"/>
           </p:cNvPicPr>
@@ -7099,8 +6761,8 @@
         </p:blipFill>
         <p:spPr>
           <a:xfrm>
-            <a:off x="997889" y="1143000"/>
-            <a:ext cx="10257182" cy="3931920"/>
+            <a:off x="2981032" y="1143000"/>
+            <a:ext cx="6290896" cy="4846320"/>
           </a:xfrm>
           <a:prstGeom prst="rect">
             <a:avLst/>
@@ -7115,8 +6777,8 @@
         </p:nvSpPr>
         <p:spPr>
           <a:xfrm>
-            <a:off x="502920" y="5166360"/>
-            <a:ext cx="11247120" cy="1371600"/>
+            <a:off x="502920" y="6053328"/>
+            <a:ext cx="11247120" cy="457200"/>
           </a:xfrm>
           <a:prstGeom prst="rect">
             <a:avLst/>
@@ -7135,13 +6797,13 @@
               </a:spcAft>
             </a:pPr>
             <a:r>
-              <a:rPr sz="1600" b="0" i="0">
-                <a:solidFill>
-                  <a:srgbClr val="333333"/>
+              <a:rPr sz="1400" b="1" i="0">
+                <a:solidFill>
+                  <a:srgbClr val="C0392B"/>
                 </a:solidFill>
                 <a:latin typeface="Droid Sans Fallback"/>
               </a:rPr>
-              <a:t>δP = 电流变化 δI 之后焦耳热的变化量：一个线性项，加一个很小的二次项。</a:t>
+              <a:t>双指数拟合用的是 100 kHz 低通之后的波形（蓝线），不是原始采样点；原始采样点只是画出来对照。</a:t>
             </a:r>
           </a:p>
         </p:txBody>
@@ -7193,27 +6855,7 @@
                 </a:solidFill>
                 <a:latin typeface="Droid Sans Fallback"/>
               </a:rPr>
-              <a:t>例子：一个脉冲</a:t>
-            </a:r>
-          </a:p>
-          <a:p>
-            <a:r>
-              <a:rPr sz="1400" b="0" i="0">
-                <a:solidFill>
-                  <a:srgbClr val="666666"/>
-                </a:solidFill>
-                <a:latin typeface="Droid Sans Fallback"/>
-              </a:rPr>
-              <a:t>Z7 PBS1，事件 30646：  </a:t>
-            </a:r>
-            <a:r>
-              <a:rPr sz="1400" b="1" i="0">
-                <a:solidFill>
-                  <a:srgbClr val="333333"/>
-                </a:solidFill>
-                <a:latin typeface="Droid Sans Fallback"/>
-              </a:rPr>
-              <a:t>同一条波形，读成 ADC 计数、读成电流、读成功率</a:t>
+              <a:t>脉冲高度：从拟合取，不从最大的采样点取</a:t>
             </a:r>
           </a:p>
         </p:txBody>
@@ -7297,7 +6939,7 @@
       </p:sp>
       <p:pic>
         <p:nvPicPr>
-          <p:cNvPr id="5" name="Picture 4" descr="peak_full.png"/>
+          <p:cNvPr id="5" name="Picture 4" descr="peak_top.png"/>
           <p:cNvPicPr>
             <a:picLocks noChangeAspect="1"/>
           </p:cNvPicPr>
@@ -7311,8 +6953,8 @@
         </p:blipFill>
         <p:spPr>
           <a:xfrm>
-            <a:off x="2981032" y="1143000"/>
-            <a:ext cx="6290896" cy="4846320"/>
+            <a:off x="1077759" y="1143000"/>
+            <a:ext cx="10097441" cy="4160520"/>
           </a:xfrm>
           <a:prstGeom prst="rect">
             <a:avLst/>
@@ -7327,8 +6969,8 @@
         </p:nvSpPr>
         <p:spPr>
           <a:xfrm>
-            <a:off x="502920" y="6053328"/>
-            <a:ext cx="11247120" cy="457200"/>
+            <a:off x="502920" y="5394960"/>
+            <a:ext cx="11247120" cy="1097280"/>
           </a:xfrm>
           <a:prstGeom prst="rect">
             <a:avLst/>
@@ -7347,13 +6989,29 @@
               </a:spcAft>
             </a:pPr>
             <a:r>
-              <a:rPr sz="1400" b="1" i="0">
-                <a:solidFill>
-                  <a:srgbClr val="C0392B"/>
+              <a:rPr sz="1600" b="0" i="0">
+                <a:solidFill>
+                  <a:srgbClr val="333333"/>
                 </a:solidFill>
                 <a:latin typeface="Droid Sans Fallback"/>
               </a:rPr>
-              <a:t>双指数拟合用的是 100 kHz 低通之后的波形（蓝线），不是原始采样点；原始采样点只是画出来对照。</a:t>
+              <a:t>黄色竖带：98 个采样点都在峰高的 10% 以内。其中最大的那个，就是噪声往上跳得最多的那个。</a:t>
+            </a:r>
+          </a:p>
+          <a:p>
+            <a:pPr>
+              <a:spcAft>
+                <a:spcPts val="800"/>
+              </a:spcAft>
+            </a:pPr>
+            <a:r>
+              <a:rPr sz="1600" b="1" i="0">
+                <a:solidFill>
+                  <a:srgbClr val="C0392B"/>
+                </a:solidFill>
+                <a:latin typeface="Droid Sans Fallback"/>
+              </a:rPr>
+              <a:t>原始数据最大值 885 ADC，拟合峰值 717 ADC：取最大值偏高 23%。滤波能减轻，拟合能消除。</a:t>
             </a:r>
           </a:p>
         </p:txBody>
@@ -7405,7 +7063,7 @@
                 </a:solidFill>
                 <a:latin typeface="Droid Sans Fallback"/>
               </a:rPr>
-              <a:t>脉冲高度：从拟合取，不从最大的采样点取</a:t>
+              <a:t>功率脉冲，它的面积就是能量</a:t>
             </a:r>
           </a:p>
         </p:txBody>
@@ -7489,7 +7147,7 @@
       </p:sp>
       <p:pic>
         <p:nvPicPr>
-          <p:cNvPr id="5" name="Picture 4" descr="peak_top.png"/>
+          <p:cNvPr id="5" name="Picture 4" descr="peak_bottom.png"/>
           <p:cNvPicPr>
             <a:picLocks noChangeAspect="1"/>
           </p:cNvPicPr>
@@ -7503,8 +7161,8 @@
         </p:blipFill>
         <p:spPr>
           <a:xfrm>
-            <a:off x="1077759" y="1143000"/>
-            <a:ext cx="10097441" cy="4160520"/>
+            <a:off x="502920" y="1213485"/>
+            <a:ext cx="11247120" cy="2967990"/>
           </a:xfrm>
           <a:prstGeom prst="rect">
             <a:avLst/>
@@ -7519,8 +7177,8 @@
         </p:nvSpPr>
         <p:spPr>
           <a:xfrm>
-            <a:off x="502920" y="5394960"/>
-            <a:ext cx="11247120" cy="1097280"/>
+            <a:off x="502920" y="4389120"/>
+            <a:ext cx="11247120" cy="2011680"/>
           </a:xfrm>
           <a:prstGeom prst="rect">
             <a:avLst/>
@@ -7545,7 +7203,7 @@
                 </a:solidFill>
                 <a:latin typeface="Droid Sans Fallback"/>
               </a:rPr>
-              <a:t>黄色竖带：98 个采样点都在峰高的 10% 以内。其中最大的那个，就是噪声往上跳得最多的那个。</a:t>
+              <a:t>红线：拟合出的电流代进公式。蓝色虚线：只有线性项。紫色点线：只有二次项，放大 20 倍。</a:t>
             </a:r>
           </a:p>
           <a:p>
@@ -7561,7 +7219,23 @@
                 </a:solidFill>
                 <a:latin typeface="Droid Sans Fallback"/>
               </a:rPr>
-              <a:t>原始数据最大值 885 ADC，拟合峰值 717 ADC：取最大值偏高 23%。滤波能减轻，拟合能消除。</a:t>
+              <a:t>二次项只占峰值的 1.9% —— 功率脉冲的形状和电流脉冲一样。</a:t>
+            </a:r>
+          </a:p>
+          <a:p>
+            <a:pPr>
+              <a:spcAft>
+                <a:spcPts val="800"/>
+              </a:spcAft>
+            </a:pPr>
+            <a:r>
+              <a:rPr sz="1600" b="1" i="0">
+                <a:solidFill>
+                  <a:srgbClr val="C0392B"/>
+                </a:solidFill>
+                <a:latin typeface="Droid Sans Fallback"/>
+              </a:rPr>
+              <a:t>粉色面积就是这个通道吸收的能量：305 eV。</a:t>
             </a:r>
           </a:p>
         </p:txBody>
@@ -7613,7 +7287,7 @@
                 </a:solidFill>
                 <a:latin typeface="Droid Sans Fallback"/>
               </a:rPr>
-              <a:t>功率脉冲，它的面积就是能量</a:t>
+              <a:t>为什么积分的是拟合脉冲，不是原始数据</a:t>
             </a:r>
           </a:p>
         </p:txBody>
@@ -7697,7 +7371,7 @@
       </p:sp>
       <p:pic>
         <p:nvPicPr>
-          <p:cNvPr id="5" name="Picture 4" descr="peak_bottom.png"/>
+          <p:cNvPr id="5" name="Picture 4" descr="raw_cum_slide.png"/>
           <p:cNvPicPr>
             <a:picLocks noChangeAspect="1"/>
           </p:cNvPicPr>
@@ -7711,8 +7385,8 @@
         </p:blipFill>
         <p:spPr>
           <a:xfrm>
-            <a:off x="502920" y="1213485"/>
-            <a:ext cx="11247120" cy="2967990"/>
+            <a:off x="1751798" y="1143000"/>
+            <a:ext cx="8749364" cy="4617720"/>
           </a:xfrm>
           <a:prstGeom prst="rect">
             <a:avLst/>
@@ -7727,8 +7401,8 @@
         </p:nvSpPr>
         <p:spPr>
           <a:xfrm>
-            <a:off x="502920" y="4389120"/>
-            <a:ext cx="11247120" cy="2011680"/>
+            <a:off x="502920" y="5788152"/>
+            <a:ext cx="11247120" cy="822960"/>
           </a:xfrm>
           <a:prstGeom prst="rect">
             <a:avLst/>
@@ -7747,13 +7421,13 @@
               </a:spcAft>
             </a:pPr>
             <a:r>
-              <a:rPr sz="1600" b="0" i="0">
+              <a:rPr sz="1300" b="0" i="0">
                 <a:solidFill>
                   <a:srgbClr val="333333"/>
                 </a:solidFill>
                 <a:latin typeface="Droid Sans Fallback"/>
               </a:rPr>
-              <a:t>红线：拟合出的电流代进公式。蓝色虚线：只有线性项。紫色点线：只有二次项，放大 20 倍。</a:t>
+              <a:t>上：这两个事件的原始电流，纵轴放大到基线附近。下：由它累计的能量（灰）和由拟合累计的能量（红）。</a:t>
             </a:r>
           </a:p>
           <a:p>
@@ -7763,29 +7437,13 @@
               </a:spcAft>
             </a:pPr>
             <a:r>
-              <a:rPr sz="1600" b="1" i="0">
+              <a:rPr sz="1300" b="1" i="0">
                 <a:solidFill>
                   <a:srgbClr val="C0392B"/>
                 </a:solidFill>
                 <a:latin typeface="Droid Sans Fallback"/>
               </a:rPr>
-              <a:t>二次项只占峰值的 1.9% —— 功率脉冲的形状和电流脉冲一样。</a:t>
-            </a:r>
-          </a:p>
-          <a:p>
-            <a:pPr>
-              <a:spcAft>
-                <a:spcPts val="800"/>
-              </a:spcAft>
-            </a:pPr>
-            <a:r>
-              <a:rPr sz="1600" b="1" i="0">
-                <a:solidFill>
-                  <a:srgbClr val="C0392B"/>
-                </a:solidFill>
-                <a:latin typeface="Droid Sans Fallback"/>
-              </a:rPr>
-              <a:t>粉色面积就是这个通道吸收的能量：305 eV。</a:t>
+              <a:t>右：脉冲过后电流比基线低 6 nA —— 埋在 28 nA 的噪声里看不出来，但 24 ms 积下来就是 −420 eV：原始 −169 eV，拟合 277 eV。</a:t>
             </a:r>
           </a:p>
         </p:txBody>
@@ -7837,7 +7495,18 @@
                 </a:solidFill>
                 <a:latin typeface="Droid Sans Fallback"/>
               </a:rPr>
-              <a:t>为什么积分的是拟合脉冲，不是原始数据</a:t>
+              <a:t>同一个事件的其他通道：加起来是 33%</a:t>
+            </a:r>
+          </a:p>
+          <a:p>
+            <a:r>
+              <a:rPr sz="1400" b="0" i="0">
+                <a:solidFill>
+                  <a:srgbClr val="666666"/>
+                </a:solidFill>
+                <a:latin typeface="Droid Sans Fallback"/>
+              </a:rPr>
+              <a:t>Z7 事件 30646；11 个通道里的 4 个</a:t>
             </a:r>
           </a:p>
         </p:txBody>
@@ -7921,7 +7590,7 @@
       </p:sp>
       <p:pic>
         <p:nvPicPr>
-          <p:cNvPr id="5" name="Picture 4" descr="raw_cum_slide.png"/>
+          <p:cNvPr id="5" name="Picture 4" descr="allchan_slide.png"/>
           <p:cNvPicPr>
             <a:picLocks noChangeAspect="1"/>
           </p:cNvPicPr>
@@ -7935,8 +7604,8 @@
         </p:blipFill>
         <p:spPr>
           <a:xfrm>
-            <a:off x="1751798" y="1143000"/>
-            <a:ext cx="8749364" cy="4617720"/>
+            <a:off x="1941141" y="1143000"/>
+            <a:ext cx="8370678" cy="4069080"/>
           </a:xfrm>
           <a:prstGeom prst="rect">
             <a:avLst/>
@@ -7951,8 +7620,8 @@
         </p:nvSpPr>
         <p:spPr>
           <a:xfrm>
-            <a:off x="502920" y="5788152"/>
-            <a:ext cx="11247120" cy="822960"/>
+            <a:off x="502920" y="5257800"/>
+            <a:ext cx="11247120" cy="1188720"/>
           </a:xfrm>
           <a:prstGeom prst="rect">
             <a:avLst/>
@@ -7971,13 +7640,13 @@
               </a:spcAft>
             </a:pPr>
             <a:r>
-              <a:rPr sz="1300" b="0" i="0">
+              <a:rPr sz="1500" b="0" i="0">
                 <a:solidFill>
                   <a:srgbClr val="333333"/>
                 </a:solidFill>
                 <a:latin typeface="Droid Sans Fallback"/>
               </a:rPr>
-              <a:t>上：这两个事件的原始电流，纵轴放大到基线附近。下：由它累计的能量（灰）和由拟合累计的能量（红）。</a:t>
+              <a:t>各通道分到的能量很不均匀（PES1 489 eV，PES2 195 eV）：事件发生的位置更靠近一侧。</a:t>
             </a:r>
           </a:p>
           <a:p>
@@ -7987,13 +7656,13 @@
               </a:spcAft>
             </a:pPr>
             <a:r>
-              <a:rPr sz="1300" b="1" i="0">
+              <a:rPr sz="1500" b="1" i="0">
                 <a:solidFill>
                   <a:srgbClr val="C0392B"/>
                 </a:solidFill>
                 <a:latin typeface="Droid Sans Fallback"/>
               </a:rPr>
-              <a:t>右：脉冲过后电流比基线低 6 nA —— 埋在 28 nA 的噪声里看不出来，但 24 ms 积下来就是 −420 eV：原始 −169 eV，拟合 277 eV。</a:t>
+              <a:t>11 个通道加起来：3419 eV = 10.37 keV 的 33.0%。   PDS2（右下）有一个缓慢的大起伏。</a:t>
             </a:r>
           </a:p>
         </p:txBody>
@@ -8045,7 +7714,7 @@
                 </a:solidFill>
                 <a:latin typeface="Droid Sans Fallback"/>
               </a:rPr>
-              <a:t>同一个事件的其他通道：加起来是 33%</a:t>
+              <a:t>现在看所有事件：一个通道给出又宽又歪的分布</a:t>
             </a:r>
           </a:p>
           <a:p>
@@ -8056,7 +7725,7 @@
                 </a:solidFill>
                 <a:latin typeface="Droid Sans Fallback"/>
               </a:rPr>
-              <a:t>Z7 事件 30646；11 个通道里的 4 个</a:t>
+              <a:t>PBS1，1917 个 K 线事件，每个事件一次拟合、一次积分</a:t>
             </a:r>
           </a:p>
         </p:txBody>
@@ -8140,7 +7809,7 @@
       </p:sp>
       <p:pic>
         <p:nvPicPr>
-          <p:cNvPr id="5" name="Picture 4" descr="allchan_slide.png"/>
+          <p:cNvPr id="5" name="Picture 4" descr="hist_PBS1.png"/>
           <p:cNvPicPr>
             <a:picLocks noChangeAspect="1"/>
           </p:cNvPicPr>
@@ -8154,8 +7823,8 @@
         </p:blipFill>
         <p:spPr>
           <a:xfrm>
-            <a:off x="1941141" y="1143000"/>
-            <a:ext cx="8370678" cy="4069080"/>
+            <a:off x="502920" y="1412748"/>
+            <a:ext cx="7863840" cy="4718304"/>
           </a:xfrm>
           <a:prstGeom prst="rect">
             <a:avLst/>
@@ -8170,8 +7839,8 @@
         </p:nvSpPr>
         <p:spPr>
           <a:xfrm>
-            <a:off x="502920" y="5257800"/>
-            <a:ext cx="11247120" cy="1188720"/>
+            <a:off x="8549640" y="1463040"/>
+            <a:ext cx="3291840" cy="4572000"/>
           </a:xfrm>
           <a:prstGeom prst="rect">
             <a:avLst/>
@@ -8196,7 +7865,7 @@
                 </a:solidFill>
                 <a:latin typeface="Droid Sans Fallback"/>
               </a:rPr>
-              <a:t>各通道分到的能量很不均匀（PES1 489 eV，PES2 195 eV）：事件发生的位置更靠近一侧。</a:t>
+              <a:t>红色：来自拟合。灰色：官方窗口在原始波形上算的。峰位只差 0.2%。</a:t>
             </a:r>
           </a:p>
           <a:p>
@@ -8212,7 +7881,39 @@
                 </a:solidFill>
                 <a:latin typeface="Droid Sans Fallback"/>
               </a:rPr>
-              <a:t>11 个通道加起来：3419 eV = 10.37 keV 的 33.0%。   PDS2（右下）有一个缓慢的大起伏。</a:t>
+              <a:t>峰 285 eV，宽度 15% —— 这可是一条能量固定的谱线。</a:t>
+            </a:r>
+          </a:p>
+          <a:p>
+            <a:pPr>
+              <a:spcAft>
+                <a:spcPts val="800"/>
+              </a:spcAft>
+            </a:pPr>
+            <a:r>
+              <a:rPr sz="1500" b="0" i="0">
+                <a:solidFill>
+                  <a:srgbClr val="333333"/>
+                </a:solidFill>
+                <a:latin typeface="Droid Sans Fallback"/>
+              </a:rPr>
+              <a:t>往右拖的尾巴，是发生在这个通道附近的事件。</a:t>
+            </a:r>
+          </a:p>
+          <a:p>
+            <a:pPr>
+              <a:spcAft>
+                <a:spcPts val="800"/>
+              </a:spcAft>
+            </a:pPr>
+            <a:r>
+              <a:rPr sz="1500" b="1" i="0">
+                <a:solidFill>
+                  <a:srgbClr val="C0392B"/>
+                </a:solidFill>
+                <a:latin typeface="Droid Sans Fallback"/>
+              </a:rPr>
+              <a:t>单通道的宽度是事件位置，不是噪声。</a:t>
             </a:r>
           </a:p>
         </p:txBody>

--- a/snolab/collection_efficiency/presentation/SNOLAB_R4_collection_efficiency_20260910_zh.pptx
+++ b/snolab/collection_efficiency/presentation/SNOLAB_R4_collection_efficiency_20260910_zh.pptx
@@ -4845,8 +4845,8 @@
         </p:blipFill>
         <p:spPr>
           <a:xfrm>
-            <a:off x="502920" y="1412748"/>
-            <a:ext cx="7863840" cy="4718304"/>
+            <a:off x="502920" y="1267932"/>
+            <a:ext cx="8046720" cy="5145096"/>
           </a:xfrm>
           <a:prstGeom prst="rect">
             <a:avLst/>
@@ -6761,8 +6761,8 @@
         </p:blipFill>
         <p:spPr>
           <a:xfrm>
-            <a:off x="2981032" y="1143000"/>
-            <a:ext cx="6290896" cy="4846320"/>
+            <a:off x="3097530" y="1143000"/>
+            <a:ext cx="6057900" cy="4846320"/>
           </a:xfrm>
           <a:prstGeom prst="rect">
             <a:avLst/>
@@ -6953,8 +6953,8 @@
         </p:blipFill>
         <p:spPr>
           <a:xfrm>
-            <a:off x="1077759" y="1143000"/>
-            <a:ext cx="10097441" cy="4160520"/>
+            <a:off x="1141012" y="1143000"/>
+            <a:ext cx="9970935" cy="4526280"/>
           </a:xfrm>
           <a:prstGeom prst="rect">
             <a:avLst/>
@@ -6969,8 +6969,8 @@
         </p:nvSpPr>
         <p:spPr>
           <a:xfrm>
-            <a:off x="502920" y="5394960"/>
-            <a:ext cx="11247120" cy="1097280"/>
+            <a:off x="502920" y="5760720"/>
+            <a:ext cx="11247120" cy="914400"/>
           </a:xfrm>
           <a:prstGeom prst="rect">
             <a:avLst/>
@@ -6989,7 +6989,7 @@
               </a:spcAft>
             </a:pPr>
             <a:r>
-              <a:rPr sz="1600" b="0" i="0">
+              <a:rPr sz="1500" b="0" i="0">
                 <a:solidFill>
                   <a:srgbClr val="333333"/>
                 </a:solidFill>
@@ -7005,7 +7005,7 @@
               </a:spcAft>
             </a:pPr>
             <a:r>
-              <a:rPr sz="1600" b="1" i="0">
+              <a:rPr sz="1500" b="1" i="0">
                 <a:solidFill>
                   <a:srgbClr val="C0392B"/>
                 </a:solidFill>
@@ -7161,8 +7161,8 @@
         </p:blipFill>
         <p:spPr>
           <a:xfrm>
-            <a:off x="502920" y="1213485"/>
-            <a:ext cx="11247120" cy="2967990"/>
+            <a:off x="1550903" y="1143000"/>
+            <a:ext cx="9151153" cy="3657599"/>
           </a:xfrm>
           <a:prstGeom prst="rect">
             <a:avLst/>
@@ -7177,8 +7177,8 @@
         </p:nvSpPr>
         <p:spPr>
           <a:xfrm>
-            <a:off x="502920" y="4389120"/>
-            <a:ext cx="11247120" cy="2011680"/>
+            <a:off x="502920" y="4937760"/>
+            <a:ext cx="11247120" cy="1645920"/>
           </a:xfrm>
           <a:prstGeom prst="rect">
             <a:avLst/>
@@ -7197,7 +7197,7 @@
               </a:spcAft>
             </a:pPr>
             <a:r>
-              <a:rPr sz="1600" b="0" i="0">
+              <a:rPr sz="1500" b="0" i="0">
                 <a:solidFill>
                   <a:srgbClr val="333333"/>
                 </a:solidFill>
@@ -7213,7 +7213,7 @@
               </a:spcAft>
             </a:pPr>
             <a:r>
-              <a:rPr sz="1600" b="1" i="0">
+              <a:rPr sz="1500" b="1" i="0">
                 <a:solidFill>
                   <a:srgbClr val="C0392B"/>
                 </a:solidFill>
@@ -7229,7 +7229,7 @@
               </a:spcAft>
             </a:pPr>
             <a:r>
-              <a:rPr sz="1600" b="1" i="0">
+              <a:rPr sz="1500" b="1" i="0">
                 <a:solidFill>
                   <a:srgbClr val="C0392B"/>
                 </a:solidFill>
@@ -7385,8 +7385,8 @@
         </p:blipFill>
         <p:spPr>
           <a:xfrm>
-            <a:off x="1751798" y="1143000"/>
-            <a:ext cx="8749364" cy="4617720"/>
+            <a:off x="1928553" y="1143000"/>
+            <a:ext cx="8395854" cy="4617720"/>
           </a:xfrm>
           <a:prstGeom prst="rect">
             <a:avLst/>
@@ -7604,8 +7604,8 @@
         </p:blipFill>
         <p:spPr>
           <a:xfrm>
-            <a:off x="1941141" y="1143000"/>
-            <a:ext cx="8370678" cy="4069080"/>
+            <a:off x="1978226" y="1143000"/>
+            <a:ext cx="8296507" cy="4251960"/>
           </a:xfrm>
           <a:prstGeom prst="rect">
             <a:avLst/>
@@ -7620,8 +7620,8 @@
         </p:nvSpPr>
         <p:spPr>
           <a:xfrm>
-            <a:off x="502920" y="5257800"/>
-            <a:ext cx="11247120" cy="1188720"/>
+            <a:off x="502920" y="5486400"/>
+            <a:ext cx="11247120" cy="1005840"/>
           </a:xfrm>
           <a:prstGeom prst="rect">
             <a:avLst/>
@@ -7823,8 +7823,8 @@
         </p:blipFill>
         <p:spPr>
           <a:xfrm>
-            <a:off x="502920" y="1412748"/>
-            <a:ext cx="7863840" cy="4718304"/>
+            <a:off x="502920" y="1148415"/>
+            <a:ext cx="8046719" cy="5384130"/>
           </a:xfrm>
           <a:prstGeom prst="rect">
             <a:avLst/>

--- a/snolab/collection_efficiency/presentation/SNOLAB_R4_collection_efficiency_20260910_zh.pptx
+++ b/snolab/collection_efficiency/presentation/SNOLAB_R4_collection_efficiency_20260910_zh.pptx
@@ -22,6 +22,7 @@
     <p:sldId id="270" r:id="rId22"/>
     <p:sldId id="271" r:id="rId23"/>
     <p:sldId id="272" r:id="rId24"/>
+    <p:sldId id="273" r:id="rId25"/>
   </p:sldIdLst>
   <p:sldSz cx="12191695" cy="6858000" type="screen4x3"/>
   <p:notesSz cx="6858000" cy="9144000"/>
@@ -1002,6 +1003,72 @@
 </file>
 
 <file path=ppt/notesSlides/notesSlide17.xml><?xml version="1.0" encoding="utf-8"?>
+<p:notes xmlns:a="http://schemas.openxmlformats.org/drawingml/2006/main" xmlns:p="http://schemas.openxmlformats.org/presentationml/2006/main" xmlns:r="http://schemas.openxmlformats.org/officeDocument/2006/relationships">
+  <p:cSld>
+    <p:spTree>
+      <p:nvGrpSpPr>
+        <p:cNvPr id="1" name=""/>
+        <p:cNvGrpSpPr/>
+        <p:nvPr/>
+      </p:nvGrpSpPr>
+      <p:grpSpPr>
+        <a:xfrm>
+          <a:off x="0" y="0"/>
+          <a:ext cx="0" cy="0"/>
+          <a:chOff x="0" y="0"/>
+          <a:chExt cx="0" cy="0"/>
+        </a:xfrm>
+      </p:grpSpPr>
+      <p:sp>
+        <p:nvSpPr>
+          <p:cNvPr id="2" name="Slide Image Placeholder 1"/>
+          <p:cNvSpPr>
+            <a:spLocks noGrp="1"/>
+          </p:cNvSpPr>
+          <p:nvPr>
+            <p:ph type="sldImg" idx="2"/>
+          </p:nvPr>
+        </p:nvSpPr>
+        <p:spPr/>
+      </p:sp>
+      <p:sp>
+        <p:nvSpPr>
+          <p:cNvPr id="3" name="Notes Placeholder 2"/>
+          <p:cNvSpPr>
+            <a:spLocks noGrp="1"/>
+          </p:cNvSpPr>
+          <p:nvPr>
+            <p:ph type="body" idx="3" sz="quarter"/>
+          </p:nvPr>
+        </p:nvSpPr>
+        <p:spPr/>
+        <p:txBody>
+          <a:bodyPr/>
+          <a:lstStyle/>
+          <a:p/>
+        </p:txBody>
+      </p:sp>
+      <p:sp>
+        <p:nvSpPr>
+          <p:cNvPr id="4" name="Slide Number Placeholder 3"/>
+          <p:cNvSpPr>
+            <a:spLocks noGrp="1"/>
+          </p:cNvSpPr>
+          <p:nvPr>
+            <p:ph type="sldNum" idx="5" sz="quarter"/>
+          </p:nvPr>
+        </p:nvSpPr>
+        <p:spPr/>
+      </p:sp>
+    </p:spTree>
+  </p:cSld>
+  <p:clrMapOvr>
+    <a:masterClrMapping/>
+  </p:clrMapOvr>
+</p:notes>
+</file>
+
+<file path=ppt/notesSlides/notesSlide18.xml><?xml version="1.0" encoding="utf-8"?>
 <p:notes xmlns:a="http://schemas.openxmlformats.org/drawingml/2006/main" xmlns:p="http://schemas.openxmlformats.org/presentationml/2006/main" xmlns:r="http://schemas.openxmlformats.org/officeDocument/2006/relationships">
   <p:cSld>
     <p:spTree>
@@ -5588,7 +5655,7 @@
                 </a:solidFill>
                 <a:latin typeface="Droid Sans Fallback"/>
               </a:rPr>
-              <a:t>Backup — 15 个事件，拟合电流和功率（PBS1）</a:t>
+              <a:t>Backup — 公式推导和逻辑</a:t>
             </a:r>
           </a:p>
         </p:txBody>
@@ -5672,7 +5739,7 @@
       </p:sp>
       <p:pic>
         <p:nvPicPr>
-          <p:cNvPr id="5" name="Picture 4" descr="pulse_15events.png"/>
+          <p:cNvPr id="5" name="Picture 4" descr="derivation_backup_zh.png"/>
           <p:cNvPicPr>
             <a:picLocks noChangeAspect="1"/>
           </p:cNvPicPr>
@@ -5686,8 +5753,8 @@
         </p:blipFill>
         <p:spPr>
           <a:xfrm>
-            <a:off x="2671354" y="1143000"/>
-            <a:ext cx="6910251" cy="5257800"/>
+            <a:off x="997072" y="1143000"/>
+            <a:ext cx="10258816" cy="5349240"/>
           </a:xfrm>
           <a:prstGeom prst="rect">
             <a:avLst/>
@@ -5741,7 +5808,7 @@
                 </a:solidFill>
                 <a:latin typeface="Droid Sans Fallback"/>
               </a:rPr>
-              <a:t>Backup — 15 个事件，累计能量（PBS1）</a:t>
+              <a:t>Backup — 15 个事件，拟合电流和功率（PBS1）</a:t>
             </a:r>
           </a:p>
         </p:txBody>
@@ -5825,7 +5892,7 @@
       </p:sp>
       <p:pic>
         <p:nvPicPr>
-          <p:cNvPr id="5" name="Picture 4" descr="cum_15events.png"/>
+          <p:cNvPr id="5" name="Picture 4" descr="pulse_15events.png"/>
           <p:cNvPicPr>
             <a:picLocks noChangeAspect="1"/>
           </p:cNvPicPr>
@@ -5894,7 +5961,7 @@
                 </a:solidFill>
                 <a:latin typeface="Droid Sans Fallback"/>
               </a:rPr>
-              <a:t>Backup — 事件 30646，全部通道</a:t>
+              <a:t>Backup — 15 个事件，累计能量（PBS1）</a:t>
             </a:r>
           </a:p>
         </p:txBody>
@@ -5978,7 +6045,7 @@
       </p:sp>
       <p:pic>
         <p:nvPicPr>
-          <p:cNvPr id="5" name="Picture 4" descr="allchan_pulses.png"/>
+          <p:cNvPr id="5" name="Picture 4" descr="cum_15events.png"/>
           <p:cNvPicPr>
             <a:picLocks noChangeAspect="1"/>
           </p:cNvPicPr>
@@ -5992,8 +6059,8 @@
         </p:blipFill>
         <p:spPr>
           <a:xfrm>
-            <a:off x="502920" y="1758921"/>
-            <a:ext cx="11247120" cy="4025957"/>
+            <a:off x="2671354" y="1143000"/>
+            <a:ext cx="6910251" cy="5257800"/>
           </a:xfrm>
           <a:prstGeom prst="rect">
             <a:avLst/>
@@ -6047,7 +6114,7 @@
                 </a:solidFill>
                 <a:latin typeface="Droid Sans Fallback"/>
               </a:rPr>
-              <a:t>Backup — 每个通道的能量分布</a:t>
+              <a:t>Backup — 事件 30646，全部通道</a:t>
             </a:r>
           </a:p>
         </p:txBody>
@@ -6125,6 +6192,159 @@
                 <a:latin typeface="Droid Sans Fallback"/>
               </a:rPr>
               <a:t>17</a:t>
+            </a:r>
+          </a:p>
+        </p:txBody>
+      </p:sp>
+      <p:pic>
+        <p:nvPicPr>
+          <p:cNvPr id="5" name="Picture 4" descr="allchan_pulses.png"/>
+          <p:cNvPicPr>
+            <a:picLocks noChangeAspect="1"/>
+          </p:cNvPicPr>
+          <p:nvPr/>
+        </p:nvPicPr>
+        <p:blipFill>
+          <a:blip r:embed="rId3"/>
+          <a:stretch>
+            <a:fillRect/>
+          </a:stretch>
+        </p:blipFill>
+        <p:spPr>
+          <a:xfrm>
+            <a:off x="502920" y="1758921"/>
+            <a:ext cx="11247120" cy="4025957"/>
+          </a:xfrm>
+          <a:prstGeom prst="rect">
+            <a:avLst/>
+          </a:prstGeom>
+        </p:spPr>
+      </p:pic>
+    </p:spTree>
+  </p:cSld>
+  <p:clrMapOvr>
+    <a:masterClrMapping/>
+  </p:clrMapOvr>
+</p:sld>
+</file>
+
+<file path=ppt/slides/slide18.xml><?xml version="1.0" encoding="utf-8"?>
+<p:sld xmlns:a="http://schemas.openxmlformats.org/drawingml/2006/main" xmlns:p="http://schemas.openxmlformats.org/presentationml/2006/main" xmlns:r="http://schemas.openxmlformats.org/officeDocument/2006/relationships">
+  <p:cSld>
+    <p:spTree>
+      <p:nvGrpSpPr>
+        <p:cNvPr id="1" name=""/>
+        <p:cNvGrpSpPr/>
+        <p:nvPr/>
+      </p:nvGrpSpPr>
+      <p:grpSpPr/>
+      <p:sp>
+        <p:nvSpPr>
+          <p:cNvPr id="2" name="TextBox 1"/>
+          <p:cNvSpPr txBox="1"/>
+          <p:nvPr/>
+        </p:nvSpPr>
+        <p:spPr>
+          <a:xfrm>
+            <a:off x="502920" y="228600"/>
+            <a:ext cx="11247120" cy="731520"/>
+          </a:xfrm>
+          <a:prstGeom prst="rect">
+            <a:avLst/>
+          </a:prstGeom>
+          <a:noFill/>
+        </p:spPr>
+        <p:txBody>
+          <a:bodyPr wrap="square">
+            <a:spAutoFit/>
+          </a:bodyPr>
+          <a:lstStyle/>
+          <a:p>
+            <a:r>
+              <a:rPr sz="2700" b="1" i="0">
+                <a:solidFill>
+                  <a:srgbClr val="1F3864"/>
+                </a:solidFill>
+                <a:latin typeface="Droid Sans Fallback"/>
+              </a:rPr>
+              <a:t>Backup — 每个通道的能量分布</a:t>
+            </a:r>
+          </a:p>
+        </p:txBody>
+      </p:sp>
+      <p:sp>
+        <p:nvSpPr>
+          <p:cNvPr id="3" name="Rectangle 2"/>
+          <p:cNvSpPr/>
+          <p:nvPr/>
+        </p:nvSpPr>
+        <p:spPr>
+          <a:xfrm>
+            <a:off x="502920" y="969264"/>
+            <a:ext cx="11247120" cy="18000"/>
+          </a:xfrm>
+          <a:prstGeom prst="rect">
+            <a:avLst/>
+          </a:prstGeom>
+          <a:solidFill>
+            <a:srgbClr val="1F3864"/>
+          </a:solidFill>
+          <a:ln>
+            <a:noFill/>
+          </a:ln>
+        </p:spPr>
+        <p:style>
+          <a:lnRef idx="1">
+            <a:schemeClr val="accent1"/>
+          </a:lnRef>
+          <a:fillRef idx="3">
+            <a:schemeClr val="accent1"/>
+          </a:fillRef>
+          <a:effectRef idx="2">
+            <a:schemeClr val="accent1"/>
+          </a:effectRef>
+          <a:fontRef idx="minor">
+            <a:schemeClr val="lt1"/>
+          </a:fontRef>
+        </p:style>
+        <p:txBody>
+          <a:bodyPr rtlCol="0" anchor="ctr"/>
+          <a:lstStyle/>
+          <a:p>
+            <a:pPr algn="ctr"/>
+          </a:p>
+        </p:txBody>
+      </p:sp>
+      <p:sp>
+        <p:nvSpPr>
+          <p:cNvPr id="4" name="TextBox 3"/>
+          <p:cNvSpPr txBox="1"/>
+          <p:nvPr/>
+        </p:nvSpPr>
+        <p:spPr>
+          <a:xfrm>
+            <a:off x="11430000" y="6446520"/>
+            <a:ext cx="548640" cy="320040"/>
+          </a:xfrm>
+          <a:prstGeom prst="rect">
+            <a:avLst/>
+          </a:prstGeom>
+          <a:noFill/>
+        </p:spPr>
+        <p:txBody>
+          <a:bodyPr wrap="square">
+            <a:spAutoFit/>
+          </a:bodyPr>
+          <a:lstStyle/>
+          <a:p>
+            <a:r>
+              <a:rPr sz="1000" b="0" i="0">
+                <a:solidFill>
+                  <a:srgbClr val="666666"/>
+                </a:solidFill>
+                <a:latin typeface="Droid Sans Fallback"/>
+              </a:rPr>
+              <a:t>18</a:t>
             </a:r>
           </a:p>
         </p:txBody>

--- a/snolab/collection_efficiency/presentation/SNOLAB_R4_collection_efficiency_20260910_zh.pptx
+++ b/snolab/collection_efficiency/presentation/SNOLAB_R4_collection_efficiency_20260910_zh.pptx
@@ -7173,8 +7173,8 @@
         </p:blipFill>
         <p:spPr>
           <a:xfrm>
-            <a:off x="1141012" y="1143000"/>
-            <a:ext cx="9970935" cy="4526280"/>
+            <a:off x="898558" y="1143000"/>
+            <a:ext cx="10455844" cy="4526280"/>
           </a:xfrm>
           <a:prstGeom prst="rect">
             <a:avLst/>
@@ -7381,8 +7381,8 @@
         </p:blipFill>
         <p:spPr>
           <a:xfrm>
-            <a:off x="1550903" y="1143000"/>
-            <a:ext cx="9151153" cy="3657599"/>
+            <a:off x="1752489" y="1143000"/>
+            <a:ext cx="8747982" cy="3657599"/>
           </a:xfrm>
           <a:prstGeom prst="rect">
             <a:avLst/>

--- a/snolab/collection_efficiency/presentation/SNOLAB_R4_collection_efficiency_20260910_zh.pptx
+++ b/snolab/collection_efficiency/presentation/SNOLAB_R4_collection_efficiency_20260910_zh.pptx
@@ -7647,7 +7647,7 @@
                 </a:solidFill>
                 <a:latin typeface="Droid Sans Fallback"/>
               </a:rPr>
-              <a:t>上：这两个事件的原始电流，纵轴放大到基线附近。下：由它累计的能量（灰）和由拟合累计的能量（红）。</a:t>
+              <a:t>上：这两个事件的原始电流；右上角小图把脉冲之后的基线放大。下：由原始电流累计的能量（灰）和由拟合累计的能量（红）。</a:t>
             </a:r>
           </a:p>
           <a:p>

--- a/snolab/collection_efficiency/presentation/SNOLAB_R4_collection_efficiency_20260910_zh.pptx
+++ b/snolab/collection_efficiency/presentation/SNOLAB_R4_collection_efficiency_20260910_zh.pptx
@@ -7605,8 +7605,8 @@
         </p:blipFill>
         <p:spPr>
           <a:xfrm>
-            <a:off x="1928553" y="1143000"/>
-            <a:ext cx="8395854" cy="4617720"/>
+            <a:off x="2468880" y="1143000"/>
+            <a:ext cx="7315200" cy="4663440"/>
           </a:xfrm>
           <a:prstGeom prst="rect">
             <a:avLst/>

--- a/snolab/collection_efficiency/presentation/SNOLAB_R4_collection_efficiency_20260910_zh.pptx
+++ b/snolab/collection_efficiency/presentation/SNOLAB_R4_collection_efficiency_20260910_zh.pptx
@@ -6420,7 +6420,7 @@
                 </a:solidFill>
                 <a:latin typeface="Droid Sans Fallback"/>
               </a:rPr>
-              <a:t>问题是什么</a:t>
+              <a:t>主要思路</a:t>
             </a:r>
           </a:p>
         </p:txBody>

--- a/snolab/collection_efficiency/presentation/SNOLAB_R4_collection_efficiency_20260910_zh.pptx
+++ b/snolab/collection_efficiency/presentation/SNOLAB_R4_collection_efficiency_20260910_zh.pptx
@@ -5439,7 +5439,7 @@
                 </a:solidFill>
                 <a:latin typeface="Droid Sans Fallback"/>
               </a:rPr>
-              <a:t>Backup — 功率公式的三个版本</a:t>
+              <a:t>Backup — 文档里的两个 Method</a:t>
             </a:r>
           </a:p>
         </p:txBody>
@@ -5555,7 +5555,7 @@
                 </a:solidFill>
                 <a:latin typeface="Droid Sans Fallback"/>
               </a:rPr>
-              <a:t>δP = I₀(R_L − R₀)·δI + c₂·R_L·(δI)²     c₂ = 2（method 1，本报告用的）、1（精确的小信号解）、−1（method 2）</a:t>
+              <a:t>δP = I₀(R_L − R₀)·δI + c₂·R_L·(δI)²     c₂ = 2 是 Method 1（本报告用的），c₂ = −1 是 Method 2</a:t>
             </a:r>
           </a:p>
           <a:p>
@@ -5571,7 +5571,7 @@
                 </a:solidFill>
                 <a:latin typeface="Droid Sans Fallback"/>
               </a:rPr>
-              <a:t>相对精确解：method 1 高 0.58%，method 2 低 1.15% —— 远小于单通道 15% 的宽度和 PDS2 的范围。</a:t>
+              <a:t>两者只有二次项不同：能量差 1.7%（PBS1，15 个事件的中位数）—— 远小于单通道 15% 的宽度和 PDS2 的范围。</a:t>
             </a:r>
           </a:p>
           <a:p>
@@ -7173,69 +7173,14 @@
         </p:blipFill>
         <p:spPr>
           <a:xfrm>
-            <a:off x="898558" y="1143000"/>
-            <a:ext cx="10455844" cy="4526280"/>
+            <a:off x="502920" y="1406070"/>
+            <a:ext cx="11247120" cy="4868819"/>
           </a:xfrm>
           <a:prstGeom prst="rect">
             <a:avLst/>
           </a:prstGeom>
         </p:spPr>
       </p:pic>
-      <p:sp>
-        <p:nvSpPr>
-          <p:cNvPr id="6" name="TextBox 5"/>
-          <p:cNvSpPr txBox="1"/>
-          <p:nvPr/>
-        </p:nvSpPr>
-        <p:spPr>
-          <a:xfrm>
-            <a:off x="502920" y="5760720"/>
-            <a:ext cx="11247120" cy="914400"/>
-          </a:xfrm>
-          <a:prstGeom prst="rect">
-            <a:avLst/>
-          </a:prstGeom>
-          <a:noFill/>
-        </p:spPr>
-        <p:txBody>
-          <a:bodyPr wrap="square">
-            <a:spAutoFit/>
-          </a:bodyPr>
-          <a:lstStyle/>
-          <a:p>
-            <a:pPr>
-              <a:spcAft>
-                <a:spcPts val="800"/>
-              </a:spcAft>
-            </a:pPr>
-            <a:r>
-              <a:rPr sz="1500" b="0" i="0">
-                <a:solidFill>
-                  <a:srgbClr val="333333"/>
-                </a:solidFill>
-                <a:latin typeface="Droid Sans Fallback"/>
-              </a:rPr>
-              <a:t>黄色竖带：98 个采样点都在峰高的 10% 以内。其中最大的那个，就是噪声往上跳得最多的那个。</a:t>
-            </a:r>
-          </a:p>
-          <a:p>
-            <a:pPr>
-              <a:spcAft>
-                <a:spcPts val="800"/>
-              </a:spcAft>
-            </a:pPr>
-            <a:r>
-              <a:rPr sz="1500" b="1" i="0">
-                <a:solidFill>
-                  <a:srgbClr val="C0392B"/>
-                </a:solidFill>
-                <a:latin typeface="Droid Sans Fallback"/>
-              </a:rPr>
-              <a:t>原始数据最大值 885 ADC，拟合峰值 717 ADC：取最大值偏高 23%。滤波能减轻，拟合能消除。</a:t>
-            </a:r>
-          </a:p>
-        </p:txBody>
-      </p:sp>
     </p:spTree>
   </p:cSld>
   <p:clrMapOvr>

--- a/snolab/collection_efficiency/presentation/SNOLAB_R4_collection_efficiency_20260910_zh.pptx
+++ b/snolab/collection_efficiency/presentation/SNOLAB_R4_collection_efficiency_20260910_zh.pptx
@@ -7173,8 +7173,8 @@
         </p:blipFill>
         <p:spPr>
           <a:xfrm>
-            <a:off x="502920" y="1406070"/>
-            <a:ext cx="11247120" cy="4868819"/>
+            <a:off x="502920" y="1272881"/>
+            <a:ext cx="11247120" cy="5135198"/>
           </a:xfrm>
           <a:prstGeom prst="rect">
             <a:avLst/>
@@ -7326,8 +7326,8 @@
         </p:blipFill>
         <p:spPr>
           <a:xfrm>
-            <a:off x="1752489" y="1143000"/>
-            <a:ext cx="8747982" cy="3657599"/>
+            <a:off x="1487227" y="1143000"/>
+            <a:ext cx="9278505" cy="3657599"/>
           </a:xfrm>
           <a:prstGeom prst="rect">
             <a:avLst/>
@@ -7452,7 +7452,7 @@
                 </a:solidFill>
                 <a:latin typeface="Droid Sans Fallback"/>
               </a:rPr>
-              <a:t>为什么积分的是拟合脉冲，不是原始数据</a:t>
+              <a:t>为什么对拟合积分，不是对原始数据</a:t>
             </a:r>
           </a:p>
         </p:txBody>
@@ -7769,24 +7769,48 @@
         </p:blipFill>
         <p:spPr>
           <a:xfrm>
-            <a:off x="1978226" y="1143000"/>
-            <a:ext cx="8296507" cy="4251960"/>
+            <a:off x="502920" y="1323022"/>
+            <a:ext cx="7772400" cy="3983355"/>
           </a:xfrm>
           <a:prstGeom prst="rect">
             <a:avLst/>
           </a:prstGeom>
         </p:spPr>
       </p:pic>
-      <p:sp>
-        <p:nvSpPr>
-          <p:cNvPr id="6" name="TextBox 5"/>
+      <p:pic>
+        <p:nvPicPr>
+          <p:cNvPr id="6" name="Picture 5" descr="chan_table_zh.png"/>
+          <p:cNvPicPr>
+            <a:picLocks noChangeAspect="1"/>
+          </p:cNvPicPr>
+          <p:nvPr/>
+        </p:nvPicPr>
+        <p:blipFill>
+          <a:blip r:embed="rId4"/>
+          <a:stretch>
+            <a:fillRect/>
+          </a:stretch>
+        </p:blipFill>
+        <p:spPr>
+          <a:xfrm>
+            <a:off x="8458200" y="1608151"/>
+            <a:ext cx="3291840" cy="4007457"/>
+          </a:xfrm>
+          <a:prstGeom prst="rect">
+            <a:avLst/>
+          </a:prstGeom>
+        </p:spPr>
+      </p:pic>
+      <p:sp>
+        <p:nvSpPr>
+          <p:cNvPr id="7" name="TextBox 6"/>
           <p:cNvSpPr txBox="1"/>
           <p:nvPr/>
         </p:nvSpPr>
         <p:spPr>
           <a:xfrm>
-            <a:off x="502920" y="5486400"/>
-            <a:ext cx="11247120" cy="1005840"/>
+            <a:off x="502920" y="5577840"/>
+            <a:ext cx="7863840" cy="1005840"/>
           </a:xfrm>
           <a:prstGeom prst="rect">
             <a:avLst/>
@@ -7805,13 +7829,13 @@
               </a:spcAft>
             </a:pPr>
             <a:r>
-              <a:rPr sz="1500" b="0" i="0">
+              <a:rPr sz="1400" b="0" i="0">
                 <a:solidFill>
                   <a:srgbClr val="333333"/>
                 </a:solidFill>
                 <a:latin typeface="Droid Sans Fallback"/>
               </a:rPr>
-              <a:t>各通道分到的能量很不均匀（PES1 489 eV，PES2 195 eV）：事件发生的位置更靠近一侧。</a:t>
+              <a:t>各通道分到的能量很不均匀：60% 落在第 1 面；PES1 一个通道就有 489 eV，而 PES2 只有 195 eV。</a:t>
             </a:r>
           </a:p>
           <a:p>
@@ -7821,7 +7845,7 @@
               </a:spcAft>
             </a:pPr>
             <a:r>
-              <a:rPr sz="1500" b="1" i="0">
+              <a:rPr sz="1400" b="1" i="0">
                 <a:solidFill>
                   <a:srgbClr val="C0392B"/>
                 </a:solidFill>

--- a/snolab/collection_efficiency/presentation/SNOLAB_R4_collection_efficiency_20260910_zh.pptx
+++ b/snolab/collection_efficiency/presentation/SNOLAB_R4_collection_efficiency_20260910_zh.pptx
@@ -6753,8 +6753,8 @@
         </p:blipFill>
         <p:spPr>
           <a:xfrm>
-            <a:off x="997889" y="1143000"/>
-            <a:ext cx="10257182" cy="3931920"/>
+            <a:off x="1892410" y="1143000"/>
+            <a:ext cx="8468139" cy="3246120"/>
           </a:xfrm>
           <a:prstGeom prst="rect">
             <a:avLst/>
@@ -6769,8 +6769,8 @@
         </p:nvSpPr>
         <p:spPr>
           <a:xfrm>
-            <a:off x="502920" y="5120640"/>
-            <a:ext cx="11247120" cy="1463040"/>
+            <a:off x="502920" y="4526280"/>
+            <a:ext cx="11247120" cy="1280160"/>
           </a:xfrm>
           <a:prstGeom prst="rect">
             <a:avLst/>
@@ -6789,7 +6789,7 @@
               </a:spcAft>
             </a:pPr>
             <a:r>
-              <a:rPr sz="1500" b="0" i="0">
+              <a:rPr sz="1300" b="0" i="0">
                 <a:solidFill>
                   <a:srgbClr val="333333"/>
                 </a:solidFill>
@@ -6805,13 +6805,63 @@
               </a:spcAft>
             </a:pPr>
             <a:r>
-              <a:rPr sz="1500" b="0" i="0">
+              <a:rPr sz="1300" b="0" i="0">
                 <a:solidFill>
                   <a:srgbClr val="333333"/>
                 </a:solidFill>
                 <a:latin typeface="Droid Sans Fallback"/>
               </a:rPr>
-              <a:t>文档里还有一个 Method 2。换成我们的符号约定是 δP = I₀(R_L − R₀)·δI − R_L·(δI)²：线性项相同，只有二次项不同，能量低 1.7%（PBS1，15 个事件的中位数）。</a:t>
+              <a:t>I₀：工作点上流过 TES 的电流 · R₀：工作点上 TES 的电阻 · R_L = R_p + R_sh：负载电阻（R_p 寄生电阻，R_sh 分流电阻）· δI：电流的变化，来自波形</a:t>
+            </a:r>
+          </a:p>
+          <a:p>
+            <a:pPr>
+              <a:spcAft>
+                <a:spcPts val="800"/>
+              </a:spcAft>
+            </a:pPr>
+            <a:r>
+              <a:rPr sz="1300" b="0" i="0">
+                <a:solidFill>
+                  <a:srgbClr val="333333"/>
+                </a:solidFill>
+                <a:latin typeface="Droid Sans Fallback"/>
+              </a:rPr>
+              <a:t>文档里还有一个 Method 2：换成我们的符号是 δP = I₀(R_L − R₀)·δI − R_L·(δI)² —— 线性项相同，只有二次项不同，能量低 1.7%（PBS1，15 个事件的中位数）。</a:t>
+            </a:r>
+          </a:p>
+        </p:txBody>
+      </p:sp>
+      <p:sp>
+        <p:nvSpPr>
+          <p:cNvPr id="7" name="TextBox 6"/>
+          <p:cNvSpPr txBox="1"/>
+          <p:nvPr/>
+        </p:nvSpPr>
+        <p:spPr>
+          <a:xfrm>
+            <a:off x="502920" y="5760720"/>
+            <a:ext cx="11247120" cy="822960"/>
+          </a:xfrm>
+          <a:prstGeom prst="rect">
+            <a:avLst/>
+          </a:prstGeom>
+          <a:noFill/>
+        </p:spPr>
+        <p:txBody>
+          <a:bodyPr wrap="square">
+            <a:spAutoFit/>
+          </a:bodyPr>
+          <a:lstStyle/>
+          <a:p>
+            <a:r>
+              <a:rPr sz="950" b="0" i="1">
+                <a:solidFill>
+                  <a:srgbClr val="666666"/>
+                </a:solidFill>
+                <a:latin typeface="Droid Sans Fallback"/>
+              </a:rPr>
+              <a:t>来源 —— CDMS wiki 的 "Collection Efficiency Analysis" 页（两个 Method 和整套流程）；Method 1 的推导见 N. Kurinsky 博士论文附录 D (slac.stanford.edu/exp/cdms/ScienceResults/Theses/kurinsky.pdf)；Method 2 见 S. Watkins 的 "energy_absorbed_deriv_v3.pdf"，在 SLAC confluence 的 "Internal Documentation: PD2 DM Search v2" 页；两者差别的讨论见 confluence 上的 "Power_derivation.pdf"；TES 方程见 Irwin &amp; Hilton, Transition-Edge Sensors, Topics in Applied Physics 99 (2005)，第 74-75 和 87-88 页。</a:t>
             </a:r>
           </a:p>
         </p:txBody>

--- a/snolab/collection_efficiency/presentation/SNOLAB_R4_collection_efficiency_20260910_zh.pptx
+++ b/snolab/collection_efficiency/presentation/SNOLAB_R4_collection_efficiency_20260910_zh.pptx
@@ -6840,7 +6840,7 @@
         </p:nvSpPr>
         <p:spPr>
           <a:xfrm>
-            <a:off x="502920" y="5760720"/>
+            <a:off x="502920" y="5806440"/>
             <a:ext cx="11247120" cy="822960"/>
           </a:xfrm>
           <a:prstGeom prst="rect">
@@ -6855,13 +6855,13 @@
           <a:lstStyle/>
           <a:p>
             <a:r>
-              <a:rPr sz="950" b="0" i="1">
+              <a:rPr sz="1100" b="0" i="1">
                 <a:solidFill>
                   <a:srgbClr val="666666"/>
                 </a:solidFill>
                 <a:latin typeface="Droid Sans Fallback"/>
               </a:rPr>
-              <a:t>来源 —— CDMS wiki 的 "Collection Efficiency Analysis" 页（两个 Method 和整套流程）；Method 1 的推导见 N. Kurinsky 博士论文附录 D (slac.stanford.edu/exp/cdms/ScienceResults/Theses/kurinsky.pdf)；Method 2 见 S. Watkins 的 "energy_absorbed_deriv_v3.pdf"，在 SLAC confluence 的 "Internal Documentation: PD2 DM Search v2" 页；两者差别的讨论见 confluence 上的 "Power_derivation.pdf"；TES 方程见 Irwin &amp; Hilton, Transition-Edge Sensors, Topics in Applied Physics 99 (2005)，第 74-75 和 87-88 页。</a:t>
+              <a:t>来源：CDMS wiki 的 Collection Efficiency Analysis 页   —   confluence.slac.stanford.edu/spaces/CDMS/pages/542577254</a:t>
             </a:r>
           </a:p>
         </p:txBody>

--- a/snolab/collection_efficiency/presentation/SNOLAB_R4_collection_efficiency_20260910_zh.pptx
+++ b/snolab/collection_efficiency/presentation/SNOLAB_R4_collection_efficiency_20260910_zh.pptx
@@ -6861,7 +6861,7 @@
                 </a:solidFill>
                 <a:latin typeface="Droid Sans Fallback"/>
               </a:rPr>
-              <a:t>来源：CDMS wiki 的 Collection Efficiency Analysis 页   —   confluence.slac.stanford.edu/spaces/CDMS/pages/542577254</a:t>
+              <a:t>来源：Antoine Rehberg 的 CDMS wiki 页面 Collection Efficiency Analysis   —   confluence.slac.stanford.edu/spaces/CDMS/pages/542577254</a:t>
             </a:r>
           </a:p>
         </p:txBody>

--- a/snolab/collection_efficiency/presentation/SNOLAB_R4_collection_efficiency_20260910_zh.pptx
+++ b/snolab/collection_efficiency/presentation/SNOLAB_R4_collection_efficiency_20260910_zh.pptx
@@ -5144,8 +5144,8 @@
         </p:nvSpPr>
         <p:spPr>
           <a:xfrm>
-            <a:off x="502920" y="1325880"/>
-            <a:ext cx="11247120" cy="5029200"/>
+            <a:off x="502920" y="1463040"/>
+            <a:ext cx="11247120" cy="4206240"/>
           </a:xfrm>
           <a:prstGeom prst="rect">
             <a:avLst/>
@@ -5164,13 +5164,13 @@
               </a:spcAft>
             </a:pPr>
             <a:r>
-              <a:rPr sz="1700" b="0" i="0">
+              <a:rPr sz="1900" b="0" i="0">
                 <a:solidFill>
                   <a:srgbClr val="333333"/>
                 </a:solidFill>
                 <a:latin typeface="Droid Sans Fallback"/>
               </a:rPr>
-              <a:t>电流脉冲通过 TES 方程变成功率脉冲；功率下面的面积就是能量。二次项只有 2%。</a:t>
+              <a:t>电流脉冲通过 TES 方程变成功率脉冲；功率下面的面积就是能量。</a:t>
             </a:r>
           </a:p>
           <a:p>
@@ -5180,13 +5180,13 @@
               </a:spcAft>
             </a:pPr>
             <a:r>
-              <a:rPr sz="1700" b="0" i="0">
+              <a:rPr sz="1900" b="0" i="0">
                 <a:solidFill>
                   <a:srgbClr val="333333"/>
                 </a:solidFill>
                 <a:latin typeface="Droid Sans Fallback"/>
               </a:rPr>
-              <a:t>能量来自拟合脉冲、从 −∞ 积到 +∞：没有最大值的噪声偏差，没有漂移。</a:t>
+              <a:t>能量用拟合脉冲来算，所以不受峰值噪声和基线漂移的影响。</a:t>
             </a:r>
           </a:p>
           <a:p>
@@ -5196,13 +5196,13 @@
               </a:spcAft>
             </a:pPr>
             <a:r>
-              <a:rPr sz="1700" b="0" i="0">
-                <a:solidFill>
-                  <a:srgbClr val="333333"/>
+              <a:rPr sz="1900" b="1" i="0">
+                <a:solidFill>
+                  <a:srgbClr val="C0392B"/>
                 </a:solidFill>
                 <a:latin typeface="Droid Sans Fallback"/>
               </a:rPr>
-              <a:t>单通道：15% 宽、歪的（位置效应）。10 个通道求和：7.5%、对称。</a:t>
+              <a:t>Z7 把一个 10.37 keV 事件的 32 ± 1% 吸收进 TES。   CDMS 文档在 R37 CUTE tower 上得到的是 26–41%。</a:t>
             </a:r>
           </a:p>
           <a:p>
@@ -5212,29 +5212,13 @@
               </a:spcAft>
             </a:pPr>
             <a:r>
-              <a:rPr sz="1700" b="1" i="0">
-                <a:solidFill>
-                  <a:srgbClr val="C0392B"/>
+              <a:rPr sz="1900" b="0" i="0">
+                <a:solidFill>
+                  <a:srgbClr val="333333"/>
                 </a:solidFill>
                 <a:latin typeface="Droid Sans Fallback"/>
               </a:rPr>
-              <a:t>Z7 把一个 10.37 keV 事件的 32 ± 1% 吸收进 TES。CDMS 文档在 R37 CUTE tower 上报的是 26–41%。</a:t>
-            </a:r>
-          </a:p>
-          <a:p>
-            <a:pPr>
-              <a:spcAft>
-                <a:spcPts val="800"/>
-              </a:spcAft>
-            </a:pPr>
-            <a:r>
-              <a:rPr sz="1700" b="0" i="0">
-                <a:solidFill>
-                  <a:srgbClr val="333333"/>
-                </a:solidFill>
-                <a:latin typeface="Droid Sans Fallback"/>
-              </a:rPr>
-              <a:t>还没落实：只做了 Z7 · Z7 的 HV 偏压没有确认（按 0 V 算） · 没有 dI/dV，电感项被丢掉 · PDS2 就是那 ±1% · 12.5% 的事件在任何通道都拟合不上，没进直方图。</a:t>
+              <a:t>还没落实：只做了 Z7 · Z7 的偏压没有确认（按 0 V 算） · 没有 dI/dV · PDS2 就是那 ±1% · 12.5% 的事件在任何通道都拟合不上。</a:t>
             </a:r>
           </a:p>
         </p:txBody>

--- a/snolab/collection_efficiency/presentation/SNOLAB_R4_collection_efficiency_20260910_zh.pptx
+++ b/snolab/collection_efficiency/presentation/SNOLAB_R4_collection_efficiency_20260910_zh.pptx
@@ -7346,7 +7346,7 @@
       </p:sp>
       <p:pic>
         <p:nvPicPr>
-          <p:cNvPr id="5" name="Picture 4" descr="peak_bottom.png"/>
+          <p:cNvPr id="5" name="Picture 4" descr="power_panel.png"/>
           <p:cNvPicPr>
             <a:picLocks noChangeAspect="1"/>
           </p:cNvPicPr>
@@ -7360,85 +7360,38 @@
         </p:blipFill>
         <p:spPr>
           <a:xfrm>
-            <a:off x="1487227" y="1143000"/>
-            <a:ext cx="9278505" cy="3657599"/>
+            <a:off x="916417" y="1143000"/>
+            <a:ext cx="6031005" cy="5257800"/>
           </a:xfrm>
           <a:prstGeom prst="rect">
             <a:avLst/>
           </a:prstGeom>
         </p:spPr>
       </p:pic>
-      <p:sp>
-        <p:nvSpPr>
-          <p:cNvPr id="6" name="TextBox 5"/>
-          <p:cNvSpPr txBox="1"/>
+      <p:pic>
+        <p:nvPicPr>
+          <p:cNvPr id="6" name="Picture 5" descr="power_legend_zh.png"/>
+          <p:cNvPicPr>
+            <a:picLocks noChangeAspect="1"/>
+          </p:cNvPicPr>
           <p:nvPr/>
-        </p:nvSpPr>
-        <p:spPr>
-          <a:xfrm>
-            <a:off x="502920" y="4937760"/>
-            <a:ext cx="11247120" cy="1645920"/>
-          </a:xfrm>
-          <a:prstGeom prst="rect">
-            <a:avLst/>
-          </a:prstGeom>
-          <a:noFill/>
-        </p:spPr>
-        <p:txBody>
-          <a:bodyPr wrap="square">
-            <a:spAutoFit/>
-          </a:bodyPr>
-          <a:lstStyle/>
-          <a:p>
-            <a:pPr>
-              <a:spcAft>
-                <a:spcPts val="800"/>
-              </a:spcAft>
-            </a:pPr>
-            <a:r>
-              <a:rPr sz="1500" b="0" i="0">
-                <a:solidFill>
-                  <a:srgbClr val="333333"/>
-                </a:solidFill>
-                <a:latin typeface="Droid Sans Fallback"/>
-              </a:rPr>
-              <a:t>红线：拟合出的电流代进公式。蓝色虚线：只有线性项。紫色点线：只有二次项，放大 20 倍。</a:t>
-            </a:r>
-          </a:p>
-          <a:p>
-            <a:pPr>
-              <a:spcAft>
-                <a:spcPts val="800"/>
-              </a:spcAft>
-            </a:pPr>
-            <a:r>
-              <a:rPr sz="1500" b="1" i="0">
-                <a:solidFill>
-                  <a:srgbClr val="C0392B"/>
-                </a:solidFill>
-                <a:latin typeface="Droid Sans Fallback"/>
-              </a:rPr>
-              <a:t>二次项只占峰值的 1.9% —— 功率脉冲的形状和电流脉冲一样。</a:t>
-            </a:r>
-          </a:p>
-          <a:p>
-            <a:pPr>
-              <a:spcAft>
-                <a:spcPts val="800"/>
-              </a:spcAft>
-            </a:pPr>
-            <a:r>
-              <a:rPr sz="1500" b="1" i="0">
-                <a:solidFill>
-                  <a:srgbClr val="C0392B"/>
-                </a:solidFill>
-                <a:latin typeface="Droid Sans Fallback"/>
-              </a:rPr>
-              <a:t>粉色面积就是这个通道吸收的能量：305 eV。</a:t>
-            </a:r>
-          </a:p>
-        </p:txBody>
-      </p:sp>
+        </p:nvPicPr>
+        <p:blipFill>
+          <a:blip r:embed="rId4"/>
+          <a:stretch>
+            <a:fillRect/>
+          </a:stretch>
+        </p:blipFill>
+        <p:spPr>
+          <a:xfrm>
+            <a:off x="7458892" y="1920240"/>
+            <a:ext cx="4284616" cy="3749039"/>
+          </a:xfrm>
+          <a:prstGeom prst="rect">
+            <a:avLst/>
+          </a:prstGeom>
+        </p:spPr>
+      </p:pic>
     </p:spTree>
   </p:cSld>
   <p:clrMapOvr>

--- a/snolab/collection_efficiency/presentation/SNOLAB_R4_collection_efficiency_20260910_zh.pptx
+++ b/snolab/collection_efficiency/presentation/SNOLAB_R4_collection_efficiency_20260910_zh.pptx
@@ -4803,7 +4803,7 @@
                 </a:solidFill>
                 <a:latin typeface="Droid Sans Fallback"/>
               </a:rPr>
-              <a:t>各通道求和：32 ± 1%</a:t>
+              <a:t>各通道求和：30.5%</a:t>
             </a:r>
           </a:p>
           <a:p>
@@ -4912,8 +4912,8 @@
         </p:blipFill>
         <p:spPr>
           <a:xfrm>
-            <a:off x="502920" y="1267932"/>
-            <a:ext cx="8046720" cy="5145096"/>
+            <a:off x="502920" y="1173806"/>
+            <a:ext cx="8046719" cy="5333348"/>
           </a:xfrm>
           <a:prstGeom prst="rect">
             <a:avLst/>
@@ -4970,7 +4970,7 @@
                 </a:solidFill>
                 <a:latin typeface="Droid Sans Fallback"/>
               </a:rPr>
-              <a:t>PDS2 只有 42% 的事件能拟合上（那个缓慢起伏），而且这些事件不典型；它的份额只能给一个范围。</a:t>
+              <a:t>PDS2 不算在内：它只有 42% 的事件能拟合上，而这些事件都发生在它附近。</a:t>
             </a:r>
           </a:p>
           <a:p>
@@ -4986,7 +4986,7 @@
                 </a:solidFill>
                 <a:latin typeface="Droid Sans Fallback"/>
               </a:rPr>
-              <a:t>完整效率 31.5–32.9%：  32 ± 1%。</a:t>
+              <a:t>收集效率 30.5% ± 2.3%（σ/μ = 7.5%）。</a:t>
             </a:r>
           </a:p>
           <a:p>
@@ -5202,7 +5202,7 @@
                 </a:solidFill>
                 <a:latin typeface="Droid Sans Fallback"/>
               </a:rPr>
-              <a:t>Z7 把一个 10.37 keV 事件的 32 ± 1% 吸收进 TES。   CDMS 文档在 R37 CUTE tower 上得到的是 26–41%。</a:t>
+              <a:t>Z7 把一个 10.37 keV 事件的 30.5% ± 2.3%（σ/μ = 7.5%）吸收进 TES，10 个通道求和。   CDMS 文档在 R37 CUTE tower 上得到的是 26–41%。</a:t>
             </a:r>
           </a:p>
           <a:p>
@@ -5218,7 +5218,7 @@
                 </a:solidFill>
                 <a:latin typeface="Droid Sans Fallback"/>
               </a:rPr>
-              <a:t>还没落实：只做了 Z7 · Z7 的偏压没有确认（按 0 V 算） · 没有 dI/dV · PDS2 就是那 ±1% · 12.5% 的事件在任何通道都拟合不上。</a:t>
+              <a:t>还没落实：只做了 Z7 · Z7 的偏压没有确认（按 0 V 算） · 没有 dI/dV · PDS2 没有算进去 · 12.5% 的事件在任何通道都拟合不上。</a:t>
             </a:r>
           </a:p>
         </p:txBody>
@@ -5555,7 +5555,7 @@
                 </a:solidFill>
                 <a:latin typeface="Droid Sans Fallback"/>
               </a:rPr>
-              <a:t>两者只有二次项不同：能量差 1.7%（PBS1，15 个事件的中位数）—— 远小于单通道 15% 的宽度和 PDS2 的范围。</a:t>
+              <a:t>两者只有二次项不同：能量差 1.7%（PBS1，15 个事件的中位数）—— 远小于单通道 15% 的宽度和求和后 7.5% 的宽度。</a:t>
             </a:r>
           </a:p>
           <a:p>
